--- a/THPC.pptx
+++ b/THPC.pptx
@@ -11,6 +11,8 @@
     <p:sldId id="260" r:id="rId5"/>
     <p:sldId id="259" r:id="rId6"/>
     <p:sldId id="261" r:id="rId7"/>
+    <p:sldId id="262" r:id="rId8"/>
+    <p:sldId id="263" r:id="rId9"/>
   </p:sldIdLst>
   <p:sldSz cx="12192000" cy="6858000"/>
   <p:notesSz cx="6858000" cy="9144000"/>
@@ -109,6 +111,11 @@
       </a:defRPr>
     </a:lvl9pPr>
   </p:defaultTextStyle>
+  <p:extLst>
+    <p:ext uri="{EFAFB233-063F-42B5-8137-9DF3F51BA10A}">
+      <p15:sldGuideLst xmlns:p15="http://schemas.microsoft.com/office/powerpoint/2012/main"/>
+    </p:ext>
+  </p:extLst>
 </p:presentation>
 </file>
 
@@ -259,7 +266,7 @@
           <a:p>
             <a:fld id="{FC4EF01A-5D70-F244-9D74-A0CB4E1E46A1}" type="datetimeFigureOut">
               <a:rPr kumimoji="1" lang="zh-CN" altLang="en-US" smtClean="0"/>
-              <a:t>2025/7/14</a:t>
+              <a:t>2025/8/11</a:t>
             </a:fld>
             <a:endParaRPr kumimoji="1" lang="zh-CN" altLang="en-US"/>
           </a:p>
@@ -457,7 +464,7 @@
           <a:p>
             <a:fld id="{FC4EF01A-5D70-F244-9D74-A0CB4E1E46A1}" type="datetimeFigureOut">
               <a:rPr kumimoji="1" lang="zh-CN" altLang="en-US" smtClean="0"/>
-              <a:t>2025/7/14</a:t>
+              <a:t>2025/8/11</a:t>
             </a:fld>
             <a:endParaRPr kumimoji="1" lang="zh-CN" altLang="en-US"/>
           </a:p>
@@ -665,7 +672,7 @@
           <a:p>
             <a:fld id="{FC4EF01A-5D70-F244-9D74-A0CB4E1E46A1}" type="datetimeFigureOut">
               <a:rPr kumimoji="1" lang="zh-CN" altLang="en-US" smtClean="0"/>
-              <a:t>2025/7/14</a:t>
+              <a:t>2025/8/11</a:t>
             </a:fld>
             <a:endParaRPr kumimoji="1" lang="zh-CN" altLang="en-US"/>
           </a:p>
@@ -863,7 +870,7 @@
           <a:p>
             <a:fld id="{FC4EF01A-5D70-F244-9D74-A0CB4E1E46A1}" type="datetimeFigureOut">
               <a:rPr kumimoji="1" lang="zh-CN" altLang="en-US" smtClean="0"/>
-              <a:t>2025/7/14</a:t>
+              <a:t>2025/8/11</a:t>
             </a:fld>
             <a:endParaRPr kumimoji="1" lang="zh-CN" altLang="en-US"/>
           </a:p>
@@ -1138,7 +1145,7 @@
           <a:p>
             <a:fld id="{FC4EF01A-5D70-F244-9D74-A0CB4E1E46A1}" type="datetimeFigureOut">
               <a:rPr kumimoji="1" lang="zh-CN" altLang="en-US" smtClean="0"/>
-              <a:t>2025/7/14</a:t>
+              <a:t>2025/8/11</a:t>
             </a:fld>
             <a:endParaRPr kumimoji="1" lang="zh-CN" altLang="en-US"/>
           </a:p>
@@ -1403,7 +1410,7 @@
           <a:p>
             <a:fld id="{FC4EF01A-5D70-F244-9D74-A0CB4E1E46A1}" type="datetimeFigureOut">
               <a:rPr kumimoji="1" lang="zh-CN" altLang="en-US" smtClean="0"/>
-              <a:t>2025/7/14</a:t>
+              <a:t>2025/8/11</a:t>
             </a:fld>
             <a:endParaRPr kumimoji="1" lang="zh-CN" altLang="en-US"/>
           </a:p>
@@ -1815,7 +1822,7 @@
           <a:p>
             <a:fld id="{FC4EF01A-5D70-F244-9D74-A0CB4E1E46A1}" type="datetimeFigureOut">
               <a:rPr kumimoji="1" lang="zh-CN" altLang="en-US" smtClean="0"/>
-              <a:t>2025/7/14</a:t>
+              <a:t>2025/8/11</a:t>
             </a:fld>
             <a:endParaRPr kumimoji="1" lang="zh-CN" altLang="en-US"/>
           </a:p>
@@ -1956,7 +1963,7 @@
           <a:p>
             <a:fld id="{FC4EF01A-5D70-F244-9D74-A0CB4E1E46A1}" type="datetimeFigureOut">
               <a:rPr kumimoji="1" lang="zh-CN" altLang="en-US" smtClean="0"/>
-              <a:t>2025/7/14</a:t>
+              <a:t>2025/8/11</a:t>
             </a:fld>
             <a:endParaRPr kumimoji="1" lang="zh-CN" altLang="en-US"/>
           </a:p>
@@ -2069,7 +2076,7 @@
           <a:p>
             <a:fld id="{FC4EF01A-5D70-F244-9D74-A0CB4E1E46A1}" type="datetimeFigureOut">
               <a:rPr kumimoji="1" lang="zh-CN" altLang="en-US" smtClean="0"/>
-              <a:t>2025/7/14</a:t>
+              <a:t>2025/8/11</a:t>
             </a:fld>
             <a:endParaRPr kumimoji="1" lang="zh-CN" altLang="en-US"/>
           </a:p>
@@ -2380,7 +2387,7 @@
           <a:p>
             <a:fld id="{FC4EF01A-5D70-F244-9D74-A0CB4E1E46A1}" type="datetimeFigureOut">
               <a:rPr kumimoji="1" lang="zh-CN" altLang="en-US" smtClean="0"/>
-              <a:t>2025/7/14</a:t>
+              <a:t>2025/8/11</a:t>
             </a:fld>
             <a:endParaRPr kumimoji="1" lang="zh-CN" altLang="en-US"/>
           </a:p>
@@ -2668,7 +2675,7 @@
           <a:p>
             <a:fld id="{FC4EF01A-5D70-F244-9D74-A0CB4E1E46A1}" type="datetimeFigureOut">
               <a:rPr kumimoji="1" lang="zh-CN" altLang="en-US" smtClean="0"/>
-              <a:t>2025/7/14</a:t>
+              <a:t>2025/8/11</a:t>
             </a:fld>
             <a:endParaRPr kumimoji="1" lang="zh-CN" altLang="en-US"/>
           </a:p>
@@ -2909,7 +2916,7 @@
           <a:p>
             <a:fld id="{FC4EF01A-5D70-F244-9D74-A0CB4E1E46A1}" type="datetimeFigureOut">
               <a:rPr kumimoji="1" lang="zh-CN" altLang="en-US" smtClean="0"/>
-              <a:t>2025/7/14</a:t>
+              <a:t>2025/8/11</a:t>
             </a:fld>
             <a:endParaRPr kumimoji="1" lang="zh-CN" altLang="en-US"/>
           </a:p>
@@ -3470,7 +3477,7 @@
         </p:nvSpPr>
         <p:spPr>
           <a:xfrm>
-            <a:off x="662152" y="3544656"/>
+            <a:off x="662152" y="3554083"/>
             <a:ext cx="6631014" cy="2360385"/>
           </a:xfrm>
           <a:prstGeom prst="rect">
@@ -3525,7 +3532,7 @@
         </p:blipFill>
         <p:spPr>
           <a:xfrm>
-            <a:off x="544086" y="515005"/>
+            <a:off x="544086" y="524432"/>
             <a:ext cx="6926660" cy="2229498"/>
           </a:xfrm>
           <a:prstGeom prst="rect">
@@ -4121,6 +4128,89 @@
               <a:t>Tasks</a:t>
             </a:r>
             <a:endParaRPr kumimoji="1" lang="zh-CN" altLang="en-US" sz="2400" dirty="0"/>
+          </a:p>
+        </p:txBody>
+      </p:sp>
+      <p:sp>
+        <p:nvSpPr>
+          <p:cNvPr id="2" name="矩形 1">
+            <a:extLst>
+              <a:ext uri="{FF2B5EF4-FFF2-40B4-BE49-F238E27FC236}">
+                <a16:creationId xmlns:a16="http://schemas.microsoft.com/office/drawing/2014/main" id="{30A14EB4-8250-4590-0FD2-B9DC06CC3A23}"/>
+              </a:ext>
+            </a:extLst>
+          </p:cNvPr>
+          <p:cNvSpPr/>
+          <p:nvPr/>
+        </p:nvSpPr>
+        <p:spPr>
+          <a:xfrm>
+            <a:off x="441815" y="4588524"/>
+            <a:ext cx="8558966" cy="1644288"/>
+          </a:xfrm>
+          <a:prstGeom prst="rect">
+            <a:avLst/>
+          </a:prstGeom>
+          <a:noFill/>
+        </p:spPr>
+        <p:style>
+          <a:lnRef idx="2">
+            <a:schemeClr val="accent1">
+              <a:shade val="15000"/>
+            </a:schemeClr>
+          </a:lnRef>
+          <a:fillRef idx="1">
+            <a:schemeClr val="accent1"/>
+          </a:fillRef>
+          <a:effectRef idx="0">
+            <a:schemeClr val="accent1"/>
+          </a:effectRef>
+          <a:fontRef idx="minor">
+            <a:schemeClr val="lt1"/>
+          </a:fontRef>
+        </p:style>
+        <p:txBody>
+          <a:bodyPr rtlCol="0" anchor="ctr"/>
+          <a:lstStyle/>
+          <a:p>
+            <a:pPr algn="ctr"/>
+            <a:endParaRPr kumimoji="1" lang="zh-CN" altLang="en-US"/>
+          </a:p>
+        </p:txBody>
+      </p:sp>
+      <p:sp>
+        <p:nvSpPr>
+          <p:cNvPr id="3" name="文本框 2">
+            <a:extLst>
+              <a:ext uri="{FF2B5EF4-FFF2-40B4-BE49-F238E27FC236}">
+                <a16:creationId xmlns:a16="http://schemas.microsoft.com/office/drawing/2014/main" id="{0B00D54F-24FD-3FF9-0DE0-2EB9E35C8C04}"/>
+              </a:ext>
+            </a:extLst>
+          </p:cNvPr>
+          <p:cNvSpPr txBox="1"/>
+          <p:nvPr/>
+        </p:nvSpPr>
+        <p:spPr>
+          <a:xfrm>
+            <a:off x="441815" y="4588524"/>
+            <a:ext cx="1282723" cy="369332"/>
+          </a:xfrm>
+          <a:prstGeom prst="rect">
+            <a:avLst/>
+          </a:prstGeom>
+          <a:noFill/>
+        </p:spPr>
+        <p:txBody>
+          <a:bodyPr wrap="none" rtlCol="0">
+            <a:spAutoFit/>
+          </a:bodyPr>
+          <a:lstStyle/>
+          <a:p>
+            <a:r>
+              <a:rPr kumimoji="1" lang="en-US" altLang="zh-CN" dirty="0"/>
+              <a:t>Generation</a:t>
+            </a:r>
+            <a:endParaRPr kumimoji="1" lang="zh-CN" altLang="en-US" dirty="0"/>
           </a:p>
         </p:txBody>
       </p:sp>
@@ -4162,53 +4252,6 @@
       </p:grpSpPr>
       <p:sp>
         <p:nvSpPr>
-          <p:cNvPr id="51" name="矩形 50">
-            <a:extLst>
-              <a:ext uri="{FF2B5EF4-FFF2-40B4-BE49-F238E27FC236}">
-                <a16:creationId xmlns:a16="http://schemas.microsoft.com/office/drawing/2014/main" id="{481F2811-6546-F0C6-B815-B591BDA8B959}"/>
-              </a:ext>
-            </a:extLst>
-          </p:cNvPr>
-          <p:cNvSpPr/>
-          <p:nvPr/>
-        </p:nvSpPr>
-        <p:spPr>
-          <a:xfrm>
-            <a:off x="3888342" y="678032"/>
-            <a:ext cx="8303657" cy="5526123"/>
-          </a:xfrm>
-          <a:prstGeom prst="rect">
-            <a:avLst/>
-          </a:prstGeom>
-          <a:noFill/>
-        </p:spPr>
-        <p:style>
-          <a:lnRef idx="2">
-            <a:schemeClr val="accent1">
-              <a:shade val="15000"/>
-            </a:schemeClr>
-          </a:lnRef>
-          <a:fillRef idx="1">
-            <a:schemeClr val="accent1"/>
-          </a:fillRef>
-          <a:effectRef idx="0">
-            <a:schemeClr val="accent1"/>
-          </a:effectRef>
-          <a:fontRef idx="minor">
-            <a:schemeClr val="lt1"/>
-          </a:fontRef>
-        </p:style>
-        <p:txBody>
-          <a:bodyPr rtlCol="0" anchor="ctr"/>
-          <a:lstStyle/>
-          <a:p>
-            <a:pPr algn="ctr"/>
-            <a:endParaRPr kumimoji="1" lang="zh-CN" altLang="en-US"/>
-          </a:p>
-        </p:txBody>
-      </p:sp>
-      <p:sp>
-        <p:nvSpPr>
           <p:cNvPr id="13" name="文本框 12">
             <a:extLst>
               <a:ext uri="{FF2B5EF4-FFF2-40B4-BE49-F238E27FC236}">
@@ -4267,1321 +4310,1853 @@
           </a:p>
         </p:txBody>
       </p:sp>
-      <p:sp>
-        <p:nvSpPr>
-          <p:cNvPr id="3" name="矩形 2">
-            <a:extLst>
-              <a:ext uri="{FF2B5EF4-FFF2-40B4-BE49-F238E27FC236}">
-                <a16:creationId xmlns:a16="http://schemas.microsoft.com/office/drawing/2014/main" id="{70393C8A-2F03-BF47-64E5-1B0741EF9749}"/>
-              </a:ext>
-            </a:extLst>
-          </p:cNvPr>
-          <p:cNvSpPr/>
+      <p:grpSp>
+        <p:nvGrpSpPr>
+          <p:cNvPr id="10" name="组合 9">
+            <a:extLst>
+              <a:ext uri="{FF2B5EF4-FFF2-40B4-BE49-F238E27FC236}">
+                <a16:creationId xmlns:a16="http://schemas.microsoft.com/office/drawing/2014/main" id="{6DC15136-0EC0-456D-3BED-D5F084F9A948}"/>
+              </a:ext>
+            </a:extLst>
+          </p:cNvPr>
+          <p:cNvGrpSpPr/>
           <p:nvPr/>
-        </p:nvSpPr>
-        <p:spPr>
+        </p:nvGrpSpPr>
+        <p:grpSpPr>
           <a:xfrm>
-            <a:off x="77596" y="1415412"/>
-            <a:ext cx="2236424" cy="1200839"/>
+            <a:off x="-137542" y="665937"/>
+            <a:ext cx="12298625" cy="5685167"/>
+            <a:chOff x="-137542" y="665937"/>
+            <a:chExt cx="12298625" cy="5685167"/>
           </a:xfrm>
-          <a:prstGeom prst="rect">
-            <a:avLst/>
-          </a:prstGeom>
-          <a:noFill/>
-        </p:spPr>
-        <p:style>
-          <a:lnRef idx="2">
-            <a:schemeClr val="accent1">
-              <a:shade val="15000"/>
-            </a:schemeClr>
-          </a:lnRef>
-          <a:fillRef idx="1">
-            <a:schemeClr val="accent1"/>
-          </a:fillRef>
-          <a:effectRef idx="0">
-            <a:schemeClr val="accent1"/>
-          </a:effectRef>
-          <a:fontRef idx="minor">
-            <a:schemeClr val="lt1"/>
-          </a:fontRef>
-        </p:style>
-        <p:txBody>
-          <a:bodyPr rtlCol="0" anchor="ctr"/>
-          <a:lstStyle/>
-          <a:p>
-            <a:pPr algn="ctr"/>
-            <a:r>
-              <a:rPr kumimoji="1" lang="en-US" altLang="zh-CN" dirty="0">
+        </p:grpSpPr>
+        <p:sp>
+          <p:nvSpPr>
+            <p:cNvPr id="51" name="矩形 50">
+              <a:extLst>
+                <a:ext uri="{FF2B5EF4-FFF2-40B4-BE49-F238E27FC236}">
+                  <a16:creationId xmlns:a16="http://schemas.microsoft.com/office/drawing/2014/main" id="{481F2811-6546-F0C6-B815-B591BDA8B959}"/>
+                </a:ext>
+              </a:extLst>
+            </p:cNvPr>
+            <p:cNvSpPr/>
+            <p:nvPr/>
+          </p:nvSpPr>
+          <p:spPr>
+            <a:xfrm>
+              <a:off x="3810746" y="665938"/>
+              <a:ext cx="8303657" cy="5685166"/>
+            </a:xfrm>
+            <a:prstGeom prst="rect">
+              <a:avLst/>
+            </a:prstGeom>
+            <a:solidFill>
+              <a:schemeClr val="bg1">
+                <a:lumMod val="95000"/>
+              </a:schemeClr>
+            </a:solidFill>
+          </p:spPr>
+          <p:style>
+            <a:lnRef idx="2">
+              <a:schemeClr val="accent1">
+                <a:shade val="15000"/>
+              </a:schemeClr>
+            </a:lnRef>
+            <a:fillRef idx="1">
+              <a:schemeClr val="accent1"/>
+            </a:fillRef>
+            <a:effectRef idx="0">
+              <a:schemeClr val="accent1"/>
+            </a:effectRef>
+            <a:fontRef idx="minor">
+              <a:schemeClr val="lt1"/>
+            </a:fontRef>
+          </p:style>
+          <p:txBody>
+            <a:bodyPr rtlCol="0" anchor="ctr"/>
+            <a:lstStyle/>
+            <a:p>
+              <a:pPr algn="ctr"/>
+              <a:endParaRPr kumimoji="1" lang="zh-CN" altLang="en-US">
+                <a:latin typeface="Times New Roman" panose="02020603050405020304" pitchFamily="18" charset="0"/>
+                <a:cs typeface="Times New Roman" panose="02020603050405020304" pitchFamily="18" charset="0"/>
+              </a:endParaRPr>
+            </a:p>
+          </p:txBody>
+        </p:sp>
+        <p:sp>
+          <p:nvSpPr>
+            <p:cNvPr id="7" name="矩形 6">
+              <a:extLst>
+                <a:ext uri="{FF2B5EF4-FFF2-40B4-BE49-F238E27FC236}">
+                  <a16:creationId xmlns:a16="http://schemas.microsoft.com/office/drawing/2014/main" id="{FE902CC8-1C6A-9DD7-8B15-C3851AD7A0E6}"/>
+                </a:ext>
+              </a:extLst>
+            </p:cNvPr>
+            <p:cNvSpPr/>
+            <p:nvPr/>
+          </p:nvSpPr>
+          <p:spPr>
+            <a:xfrm>
+              <a:off x="-137542" y="665937"/>
+              <a:ext cx="7564731" cy="5367115"/>
+            </a:xfrm>
+            <a:prstGeom prst="rect">
+              <a:avLst/>
+            </a:prstGeom>
+            <a:solidFill>
+              <a:schemeClr val="bg1">
+                <a:lumMod val="85000"/>
+              </a:schemeClr>
+            </a:solidFill>
+          </p:spPr>
+          <p:style>
+            <a:lnRef idx="2">
+              <a:schemeClr val="accent1">
+                <a:shade val="15000"/>
+              </a:schemeClr>
+            </a:lnRef>
+            <a:fillRef idx="1">
+              <a:schemeClr val="accent1"/>
+            </a:fillRef>
+            <a:effectRef idx="0">
+              <a:schemeClr val="accent1"/>
+            </a:effectRef>
+            <a:fontRef idx="minor">
+              <a:schemeClr val="lt1"/>
+            </a:fontRef>
+          </p:style>
+          <p:txBody>
+            <a:bodyPr rtlCol="0" anchor="ctr"/>
+            <a:lstStyle/>
+            <a:p>
+              <a:pPr algn="ctr"/>
+              <a:endParaRPr kumimoji="1" lang="zh-CN" altLang="en-US">
+                <a:latin typeface="Times New Roman" panose="02020603050405020304" pitchFamily="18" charset="0"/>
+                <a:cs typeface="Times New Roman" panose="02020603050405020304" pitchFamily="18" charset="0"/>
+              </a:endParaRPr>
+            </a:p>
+          </p:txBody>
+        </p:sp>
+        <p:sp>
+          <p:nvSpPr>
+            <p:cNvPr id="3" name="矩形 2">
+              <a:extLst>
+                <a:ext uri="{FF2B5EF4-FFF2-40B4-BE49-F238E27FC236}">
+                  <a16:creationId xmlns:a16="http://schemas.microsoft.com/office/drawing/2014/main" id="{70393C8A-2F03-BF47-64E5-1B0741EF9749}"/>
+                </a:ext>
+              </a:extLst>
+            </p:cNvPr>
+            <p:cNvSpPr/>
+            <p:nvPr/>
+          </p:nvSpPr>
+          <p:spPr>
+            <a:xfrm>
+              <a:off x="0" y="1403318"/>
+              <a:ext cx="2236424" cy="1200839"/>
+            </a:xfrm>
+            <a:prstGeom prst="rect">
+              <a:avLst/>
+            </a:prstGeom>
+            <a:solidFill>
+              <a:srgbClr val="00B0F0"/>
+            </a:solidFill>
+          </p:spPr>
+          <p:style>
+            <a:lnRef idx="2">
+              <a:schemeClr val="accent1">
+                <a:shade val="15000"/>
+              </a:schemeClr>
+            </a:lnRef>
+            <a:fillRef idx="1">
+              <a:schemeClr val="accent1"/>
+            </a:fillRef>
+            <a:effectRef idx="0">
+              <a:schemeClr val="accent1"/>
+            </a:effectRef>
+            <a:fontRef idx="minor">
+              <a:schemeClr val="lt1"/>
+            </a:fontRef>
+          </p:style>
+          <p:txBody>
+            <a:bodyPr rtlCol="0" anchor="ctr"/>
+            <a:lstStyle/>
+            <a:p>
+              <a:pPr algn="ctr"/>
+              <a:r>
+                <a:rPr kumimoji="1" lang="en-US" altLang="zh-CN" dirty="0">
+                  <a:solidFill>
+                    <a:schemeClr val="tx1"/>
+                  </a:solidFill>
+                  <a:latin typeface="Times New Roman" panose="02020603050405020304" pitchFamily="18" charset="0"/>
+                  <a:cs typeface="Times New Roman" panose="02020603050405020304" pitchFamily="18" charset="0"/>
+                </a:rPr>
+                <a:t>Natural Language</a:t>
+              </a:r>
+              <a:endParaRPr kumimoji="1" lang="zh-CN" altLang="en-US" dirty="0">
                 <a:solidFill>
                   <a:schemeClr val="tx1"/>
                 </a:solidFill>
-              </a:rPr>
-              <a:t>Natural Language</a:t>
-            </a:r>
-            <a:endParaRPr kumimoji="1" lang="zh-CN" altLang="en-US" dirty="0">
-              <a:solidFill>
-                <a:schemeClr val="tx1"/>
-              </a:solidFill>
-            </a:endParaRPr>
-          </a:p>
-        </p:txBody>
-      </p:sp>
-      <p:sp>
-        <p:nvSpPr>
-          <p:cNvPr id="14" name="矩形 13">
-            <a:extLst>
-              <a:ext uri="{FF2B5EF4-FFF2-40B4-BE49-F238E27FC236}">
-                <a16:creationId xmlns:a16="http://schemas.microsoft.com/office/drawing/2014/main" id="{E843AC5A-8784-A39A-835A-23B4C2A5A579}"/>
-              </a:ext>
-            </a:extLst>
-          </p:cNvPr>
-          <p:cNvSpPr/>
-          <p:nvPr/>
-        </p:nvSpPr>
-        <p:spPr>
-          <a:xfrm>
-            <a:off x="4364722" y="1344057"/>
-            <a:ext cx="2236424" cy="1200839"/>
-          </a:xfrm>
-          <a:prstGeom prst="rect">
-            <a:avLst/>
-          </a:prstGeom>
-          <a:noFill/>
-        </p:spPr>
-        <p:style>
-          <a:lnRef idx="2">
-            <a:schemeClr val="accent1">
-              <a:shade val="15000"/>
-            </a:schemeClr>
-          </a:lnRef>
-          <a:fillRef idx="1">
-            <a:schemeClr val="accent1"/>
-          </a:fillRef>
-          <a:effectRef idx="0">
-            <a:schemeClr val="accent1"/>
-          </a:effectRef>
-          <a:fontRef idx="minor">
-            <a:schemeClr val="lt1"/>
-          </a:fontRef>
-        </p:style>
-        <p:txBody>
-          <a:bodyPr rtlCol="0" anchor="ctr"/>
-          <a:lstStyle/>
-          <a:p>
-            <a:pPr algn="ctr"/>
-            <a:r>
-              <a:rPr kumimoji="1" lang="en-US" altLang="zh-CN" dirty="0">
+                <a:latin typeface="Times New Roman" panose="02020603050405020304" pitchFamily="18" charset="0"/>
+                <a:cs typeface="Times New Roman" panose="02020603050405020304" pitchFamily="18" charset="0"/>
+              </a:endParaRPr>
+            </a:p>
+          </p:txBody>
+        </p:sp>
+        <p:sp>
+          <p:nvSpPr>
+            <p:cNvPr id="14" name="矩形 13">
+              <a:extLst>
+                <a:ext uri="{FF2B5EF4-FFF2-40B4-BE49-F238E27FC236}">
+                  <a16:creationId xmlns:a16="http://schemas.microsoft.com/office/drawing/2014/main" id="{E843AC5A-8784-A39A-835A-23B4C2A5A579}"/>
+                </a:ext>
+              </a:extLst>
+            </p:cNvPr>
+            <p:cNvSpPr/>
+            <p:nvPr/>
+          </p:nvSpPr>
+          <p:spPr>
+            <a:xfrm>
+              <a:off x="4287126" y="1331963"/>
+              <a:ext cx="2236424" cy="1200839"/>
+            </a:xfrm>
+            <a:prstGeom prst="rect">
+              <a:avLst/>
+            </a:prstGeom>
+            <a:solidFill>
+              <a:srgbClr val="00B050"/>
+            </a:solidFill>
+          </p:spPr>
+          <p:style>
+            <a:lnRef idx="2">
+              <a:schemeClr val="accent1">
+                <a:shade val="15000"/>
+              </a:schemeClr>
+            </a:lnRef>
+            <a:fillRef idx="1">
+              <a:schemeClr val="accent1"/>
+            </a:fillRef>
+            <a:effectRef idx="0">
+              <a:schemeClr val="accent1"/>
+            </a:effectRef>
+            <a:fontRef idx="minor">
+              <a:schemeClr val="lt1"/>
+            </a:fontRef>
+          </p:style>
+          <p:txBody>
+            <a:bodyPr rtlCol="0" anchor="ctr"/>
+            <a:lstStyle/>
+            <a:p>
+              <a:pPr algn="ctr"/>
+              <a:r>
+                <a:rPr kumimoji="1" lang="en-US" altLang="zh-CN" dirty="0">
+                  <a:solidFill>
+                    <a:schemeClr val="tx1"/>
+                  </a:solidFill>
+                  <a:latin typeface="Times New Roman" panose="02020603050405020304" pitchFamily="18" charset="0"/>
+                  <a:cs typeface="Times New Roman" panose="02020603050405020304" pitchFamily="18" charset="0"/>
+                </a:rPr>
+                <a:t>High Level</a:t>
+              </a:r>
+            </a:p>
+            <a:p>
+              <a:pPr algn="ctr"/>
+              <a:r>
+                <a:rPr kumimoji="1" lang="en-US" altLang="zh-CN" dirty="0">
+                  <a:solidFill>
+                    <a:schemeClr val="tx1"/>
+                  </a:solidFill>
+                  <a:latin typeface="Times New Roman" panose="02020603050405020304" pitchFamily="18" charset="0"/>
+                  <a:cs typeface="Times New Roman" panose="02020603050405020304" pitchFamily="18" charset="0"/>
+                </a:rPr>
+                <a:t>Programming</a:t>
+              </a:r>
+            </a:p>
+            <a:p>
+              <a:pPr algn="ctr"/>
+              <a:r>
+                <a:rPr kumimoji="1" lang="en-US" altLang="zh-CN" dirty="0">
+                  <a:solidFill>
+                    <a:schemeClr val="tx1"/>
+                  </a:solidFill>
+                  <a:latin typeface="Times New Roman" panose="02020603050405020304" pitchFamily="18" charset="0"/>
+                  <a:cs typeface="Times New Roman" panose="02020603050405020304" pitchFamily="18" charset="0"/>
+                </a:rPr>
+                <a:t>Language</a:t>
+              </a:r>
+              <a:endParaRPr kumimoji="1" lang="zh-CN" altLang="en-US" dirty="0">
                 <a:solidFill>
                   <a:schemeClr val="tx1"/>
                 </a:solidFill>
-              </a:rPr>
-              <a:t>High Level</a:t>
-            </a:r>
-          </a:p>
-          <a:p>
-            <a:pPr algn="ctr"/>
-            <a:r>
-              <a:rPr kumimoji="1" lang="en-US" altLang="zh-CN" dirty="0">
+                <a:latin typeface="Times New Roman" panose="02020603050405020304" pitchFamily="18" charset="0"/>
+                <a:cs typeface="Times New Roman" panose="02020603050405020304" pitchFamily="18" charset="0"/>
+              </a:endParaRPr>
+            </a:p>
+          </p:txBody>
+        </p:sp>
+        <p:sp>
+          <p:nvSpPr>
+            <p:cNvPr id="15" name="矩形 14">
+              <a:extLst>
+                <a:ext uri="{FF2B5EF4-FFF2-40B4-BE49-F238E27FC236}">
+                  <a16:creationId xmlns:a16="http://schemas.microsoft.com/office/drawing/2014/main" id="{87EBD3BA-5BA9-DAEB-B71B-8ED85B9C11B6}"/>
+                </a:ext>
+              </a:extLst>
+            </p:cNvPr>
+            <p:cNvSpPr/>
+            <p:nvPr/>
+          </p:nvSpPr>
+          <p:spPr>
+            <a:xfrm>
+              <a:off x="8964421" y="1331963"/>
+              <a:ext cx="2236424" cy="1200839"/>
+            </a:xfrm>
+            <a:prstGeom prst="rect">
+              <a:avLst/>
+            </a:prstGeom>
+            <a:solidFill>
+              <a:srgbClr val="FFC000"/>
+            </a:solidFill>
+          </p:spPr>
+          <p:style>
+            <a:lnRef idx="2">
+              <a:schemeClr val="accent1">
+                <a:shade val="15000"/>
+              </a:schemeClr>
+            </a:lnRef>
+            <a:fillRef idx="1">
+              <a:schemeClr val="accent1"/>
+            </a:fillRef>
+            <a:effectRef idx="0">
+              <a:schemeClr val="accent1"/>
+            </a:effectRef>
+            <a:fontRef idx="minor">
+              <a:schemeClr val="lt1"/>
+            </a:fontRef>
+          </p:style>
+          <p:txBody>
+            <a:bodyPr rtlCol="0" anchor="ctr"/>
+            <a:lstStyle/>
+            <a:p>
+              <a:pPr algn="ctr"/>
+              <a:r>
+                <a:rPr kumimoji="1" lang="en-US" altLang="zh-CN" dirty="0">
+                  <a:solidFill>
+                    <a:schemeClr val="tx1"/>
+                  </a:solidFill>
+                  <a:latin typeface="Times New Roman" panose="02020603050405020304" pitchFamily="18" charset="0"/>
+                  <a:cs typeface="Times New Roman" panose="02020603050405020304" pitchFamily="18" charset="0"/>
+                </a:rPr>
+                <a:t>Low Level</a:t>
+              </a:r>
+            </a:p>
+            <a:p>
+              <a:pPr algn="ctr"/>
+              <a:r>
+                <a:rPr kumimoji="1" lang="en-US" altLang="zh-CN" dirty="0">
+                  <a:solidFill>
+                    <a:schemeClr val="tx1"/>
+                  </a:solidFill>
+                  <a:latin typeface="Times New Roman" panose="02020603050405020304" pitchFamily="18" charset="0"/>
+                  <a:cs typeface="Times New Roman" panose="02020603050405020304" pitchFamily="18" charset="0"/>
+                </a:rPr>
+                <a:t>IR/Assembly</a:t>
+              </a:r>
+            </a:p>
+            <a:p>
+              <a:pPr algn="ctr"/>
+              <a:r>
+                <a:rPr kumimoji="1" lang="en-US" altLang="zh-CN" dirty="0">
+                  <a:solidFill>
+                    <a:schemeClr val="tx1"/>
+                  </a:solidFill>
+                  <a:latin typeface="Times New Roman" panose="02020603050405020304" pitchFamily="18" charset="0"/>
+                  <a:cs typeface="Times New Roman" panose="02020603050405020304" pitchFamily="18" charset="0"/>
+                </a:rPr>
+                <a:t>Language</a:t>
+              </a:r>
+              <a:endParaRPr kumimoji="1" lang="zh-CN" altLang="en-US" dirty="0">
                 <a:solidFill>
                   <a:schemeClr val="tx1"/>
                 </a:solidFill>
-              </a:rPr>
-              <a:t>Programming</a:t>
-            </a:r>
-          </a:p>
-          <a:p>
-            <a:pPr algn="ctr"/>
-            <a:r>
-              <a:rPr kumimoji="1" lang="en-US" altLang="zh-CN" dirty="0">
+                <a:latin typeface="Times New Roman" panose="02020603050405020304" pitchFamily="18" charset="0"/>
+                <a:cs typeface="Times New Roman" panose="02020603050405020304" pitchFamily="18" charset="0"/>
+              </a:endParaRPr>
+            </a:p>
+          </p:txBody>
+        </p:sp>
+        <p:sp>
+          <p:nvSpPr>
+            <p:cNvPr id="16" name="右箭头 15">
+              <a:extLst>
+                <a:ext uri="{FF2B5EF4-FFF2-40B4-BE49-F238E27FC236}">
+                  <a16:creationId xmlns:a16="http://schemas.microsoft.com/office/drawing/2014/main" id="{C9B37F20-A39B-5E7A-FE7E-04CEEAE1F5E4}"/>
+                </a:ext>
+              </a:extLst>
+            </p:cNvPr>
+            <p:cNvSpPr/>
+            <p:nvPr/>
+          </p:nvSpPr>
+          <p:spPr>
+            <a:xfrm>
+              <a:off x="2435577" y="1432041"/>
+              <a:ext cx="1280160" cy="381430"/>
+            </a:xfrm>
+            <a:prstGeom prst="rightArrow">
+              <a:avLst/>
+            </a:prstGeom>
+          </p:spPr>
+          <p:style>
+            <a:lnRef idx="2">
+              <a:schemeClr val="accent1">
+                <a:shade val="15000"/>
+              </a:schemeClr>
+            </a:lnRef>
+            <a:fillRef idx="1">
+              <a:schemeClr val="accent1"/>
+            </a:fillRef>
+            <a:effectRef idx="0">
+              <a:schemeClr val="accent1"/>
+            </a:effectRef>
+            <a:fontRef idx="minor">
+              <a:schemeClr val="lt1"/>
+            </a:fontRef>
+          </p:style>
+          <p:txBody>
+            <a:bodyPr rtlCol="0" anchor="ctr"/>
+            <a:lstStyle/>
+            <a:p>
+              <a:pPr algn="ctr"/>
+              <a:endParaRPr kumimoji="1" lang="zh-CN" altLang="en-US">
+                <a:latin typeface="Times New Roman" panose="02020603050405020304" pitchFamily="18" charset="0"/>
+                <a:cs typeface="Times New Roman" panose="02020603050405020304" pitchFamily="18" charset="0"/>
+              </a:endParaRPr>
+            </a:p>
+          </p:txBody>
+        </p:sp>
+        <p:sp>
+          <p:nvSpPr>
+            <p:cNvPr id="17" name="文本框 16">
+              <a:extLst>
+                <a:ext uri="{FF2B5EF4-FFF2-40B4-BE49-F238E27FC236}">
+                  <a16:creationId xmlns:a16="http://schemas.microsoft.com/office/drawing/2014/main" id="{514795CC-E9B5-E6A4-ACE5-44CA6CCEEF2A}"/>
+                </a:ext>
+              </a:extLst>
+            </p:cNvPr>
+            <p:cNvSpPr txBox="1"/>
+            <p:nvPr/>
+          </p:nvSpPr>
+          <p:spPr>
+            <a:xfrm>
+              <a:off x="1972191" y="994063"/>
+              <a:ext cx="1704313" cy="369332"/>
+            </a:xfrm>
+            <a:prstGeom prst="rect">
+              <a:avLst/>
+            </a:prstGeom>
+            <a:noFill/>
+          </p:spPr>
+          <p:txBody>
+            <a:bodyPr wrap="none" rtlCol="0">
+              <a:spAutoFit/>
+            </a:bodyPr>
+            <a:lstStyle/>
+            <a:p>
+              <a:r>
+                <a:rPr kumimoji="1" lang="en-US" altLang="zh-CN" dirty="0">
+                  <a:latin typeface="Times New Roman" panose="02020603050405020304" pitchFamily="18" charset="0"/>
+                  <a:cs typeface="Times New Roman" panose="02020603050405020304" pitchFamily="18" charset="0"/>
+                </a:rPr>
+                <a:t>Code generation</a:t>
+              </a:r>
+              <a:endParaRPr kumimoji="1" lang="zh-CN" altLang="en-US" dirty="0">
+                <a:latin typeface="Times New Roman" panose="02020603050405020304" pitchFamily="18" charset="0"/>
+                <a:cs typeface="Times New Roman" panose="02020603050405020304" pitchFamily="18" charset="0"/>
+              </a:endParaRPr>
+            </a:p>
+          </p:txBody>
+        </p:sp>
+        <p:sp>
+          <p:nvSpPr>
+            <p:cNvPr id="18" name="右箭头 17">
+              <a:extLst>
+                <a:ext uri="{FF2B5EF4-FFF2-40B4-BE49-F238E27FC236}">
+                  <a16:creationId xmlns:a16="http://schemas.microsoft.com/office/drawing/2014/main" id="{D2F2D2FF-53B4-F09A-155F-F53A6C542123}"/>
+                </a:ext>
+              </a:extLst>
+            </p:cNvPr>
+            <p:cNvSpPr/>
+            <p:nvPr/>
+          </p:nvSpPr>
+          <p:spPr>
+            <a:xfrm rot="10800000">
+              <a:off x="2395962" y="2222727"/>
+              <a:ext cx="1280160" cy="381430"/>
+            </a:xfrm>
+            <a:prstGeom prst="rightArrow">
+              <a:avLst/>
+            </a:prstGeom>
+          </p:spPr>
+          <p:style>
+            <a:lnRef idx="2">
+              <a:schemeClr val="accent1">
+                <a:shade val="15000"/>
+              </a:schemeClr>
+            </a:lnRef>
+            <a:fillRef idx="1">
+              <a:schemeClr val="accent1"/>
+            </a:fillRef>
+            <a:effectRef idx="0">
+              <a:schemeClr val="accent1"/>
+            </a:effectRef>
+            <a:fontRef idx="minor">
+              <a:schemeClr val="lt1"/>
+            </a:fontRef>
+          </p:style>
+          <p:txBody>
+            <a:bodyPr rtlCol="0" anchor="ctr"/>
+            <a:lstStyle/>
+            <a:p>
+              <a:pPr algn="ctr"/>
+              <a:endParaRPr kumimoji="1" lang="zh-CN" altLang="en-US">
+                <a:latin typeface="Times New Roman" panose="02020603050405020304" pitchFamily="18" charset="0"/>
+                <a:cs typeface="Times New Roman" panose="02020603050405020304" pitchFamily="18" charset="0"/>
+              </a:endParaRPr>
+            </a:p>
+          </p:txBody>
+        </p:sp>
+        <p:sp>
+          <p:nvSpPr>
+            <p:cNvPr id="19" name="文本框 18">
+              <a:extLst>
+                <a:ext uri="{FF2B5EF4-FFF2-40B4-BE49-F238E27FC236}">
+                  <a16:creationId xmlns:a16="http://schemas.microsoft.com/office/drawing/2014/main" id="{E5A6E9EE-75FA-715B-B85D-7685CF480AB4}"/>
+                </a:ext>
+              </a:extLst>
+            </p:cNvPr>
+            <p:cNvSpPr txBox="1"/>
+            <p:nvPr/>
+          </p:nvSpPr>
+          <p:spPr>
+            <a:xfrm>
+              <a:off x="1497293" y="2672804"/>
+              <a:ext cx="2140330" cy="369332"/>
+            </a:xfrm>
+            <a:prstGeom prst="rect">
+              <a:avLst/>
+            </a:prstGeom>
+            <a:noFill/>
+          </p:spPr>
+          <p:txBody>
+            <a:bodyPr wrap="none" rtlCol="0">
+              <a:spAutoFit/>
+            </a:bodyPr>
+            <a:lstStyle/>
+            <a:p>
+              <a:r>
+                <a:rPr kumimoji="1" lang="en-US" altLang="zh-CN" dirty="0">
+                  <a:latin typeface="Times New Roman" panose="02020603050405020304" pitchFamily="18" charset="0"/>
+                  <a:cs typeface="Times New Roman" panose="02020603050405020304" pitchFamily="18" charset="0"/>
+                </a:rPr>
+                <a:t>Code comprehension</a:t>
+              </a:r>
+              <a:endParaRPr kumimoji="1" lang="zh-CN" altLang="en-US" dirty="0">
+                <a:latin typeface="Times New Roman" panose="02020603050405020304" pitchFamily="18" charset="0"/>
+                <a:cs typeface="Times New Roman" panose="02020603050405020304" pitchFamily="18" charset="0"/>
+              </a:endParaRPr>
+            </a:p>
+          </p:txBody>
+        </p:sp>
+        <p:sp>
+          <p:nvSpPr>
+            <p:cNvPr id="20" name="右箭头 19">
+              <a:extLst>
+                <a:ext uri="{FF2B5EF4-FFF2-40B4-BE49-F238E27FC236}">
+                  <a16:creationId xmlns:a16="http://schemas.microsoft.com/office/drawing/2014/main" id="{A9330039-05F1-52F8-3CB4-DF93D6FA6900}"/>
+                </a:ext>
+              </a:extLst>
+            </p:cNvPr>
+            <p:cNvSpPr/>
+            <p:nvPr/>
+          </p:nvSpPr>
+          <p:spPr>
+            <a:xfrm>
+              <a:off x="7504189" y="1398124"/>
+              <a:ext cx="1280160" cy="381430"/>
+            </a:xfrm>
+            <a:prstGeom prst="rightArrow">
+              <a:avLst/>
+            </a:prstGeom>
+          </p:spPr>
+          <p:style>
+            <a:lnRef idx="2">
+              <a:schemeClr val="accent1">
+                <a:shade val="15000"/>
+              </a:schemeClr>
+            </a:lnRef>
+            <a:fillRef idx="1">
+              <a:schemeClr val="accent1"/>
+            </a:fillRef>
+            <a:effectRef idx="0">
+              <a:schemeClr val="accent1"/>
+            </a:effectRef>
+            <a:fontRef idx="minor">
+              <a:schemeClr val="lt1"/>
+            </a:fontRef>
+          </p:style>
+          <p:txBody>
+            <a:bodyPr rtlCol="0" anchor="ctr"/>
+            <a:lstStyle/>
+            <a:p>
+              <a:pPr algn="ctr"/>
+              <a:endParaRPr kumimoji="1" lang="zh-CN" altLang="en-US">
+                <a:latin typeface="Times New Roman" panose="02020603050405020304" pitchFamily="18" charset="0"/>
+                <a:cs typeface="Times New Roman" panose="02020603050405020304" pitchFamily="18" charset="0"/>
+              </a:endParaRPr>
+            </a:p>
+          </p:txBody>
+        </p:sp>
+        <p:sp>
+          <p:nvSpPr>
+            <p:cNvPr id="21" name="右箭头 20">
+              <a:extLst>
+                <a:ext uri="{FF2B5EF4-FFF2-40B4-BE49-F238E27FC236}">
+                  <a16:creationId xmlns:a16="http://schemas.microsoft.com/office/drawing/2014/main" id="{F169FB9B-ED97-EB2B-A2D0-04F8924CDE20}"/>
+                </a:ext>
+              </a:extLst>
+            </p:cNvPr>
+            <p:cNvSpPr/>
+            <p:nvPr/>
+          </p:nvSpPr>
+          <p:spPr>
+            <a:xfrm rot="10800000">
+              <a:off x="7504189" y="2195500"/>
+              <a:ext cx="1280160" cy="381430"/>
+            </a:xfrm>
+            <a:prstGeom prst="rightArrow">
+              <a:avLst/>
+            </a:prstGeom>
+          </p:spPr>
+          <p:style>
+            <a:lnRef idx="2">
+              <a:schemeClr val="accent1">
+                <a:shade val="15000"/>
+              </a:schemeClr>
+            </a:lnRef>
+            <a:fillRef idx="1">
+              <a:schemeClr val="accent1"/>
+            </a:fillRef>
+            <a:effectRef idx="0">
+              <a:schemeClr val="accent1"/>
+            </a:effectRef>
+            <a:fontRef idx="minor">
+              <a:schemeClr val="lt1"/>
+            </a:fontRef>
+          </p:style>
+          <p:txBody>
+            <a:bodyPr rtlCol="0" anchor="ctr"/>
+            <a:lstStyle/>
+            <a:p>
+              <a:pPr algn="ctr"/>
+              <a:endParaRPr kumimoji="1" lang="zh-CN" altLang="en-US">
+                <a:latin typeface="Times New Roman" panose="02020603050405020304" pitchFamily="18" charset="0"/>
+                <a:cs typeface="Times New Roman" panose="02020603050405020304" pitchFamily="18" charset="0"/>
+              </a:endParaRPr>
+            </a:p>
+          </p:txBody>
+        </p:sp>
+        <p:sp>
+          <p:nvSpPr>
+            <p:cNvPr id="23" name="文本框 22">
+              <a:extLst>
+                <a:ext uri="{FF2B5EF4-FFF2-40B4-BE49-F238E27FC236}">
+                  <a16:creationId xmlns:a16="http://schemas.microsoft.com/office/drawing/2014/main" id="{172EA616-AD89-B643-4107-43EF8FFB7610}"/>
+                </a:ext>
+              </a:extLst>
+            </p:cNvPr>
+            <p:cNvSpPr txBox="1"/>
+            <p:nvPr/>
+          </p:nvSpPr>
+          <p:spPr>
+            <a:xfrm>
+              <a:off x="7639964" y="982178"/>
+              <a:ext cx="1008609" cy="369332"/>
+            </a:xfrm>
+            <a:prstGeom prst="rect">
+              <a:avLst/>
+            </a:prstGeom>
+            <a:noFill/>
+          </p:spPr>
+          <p:txBody>
+            <a:bodyPr wrap="none" rtlCol="0">
+              <a:spAutoFit/>
+            </a:bodyPr>
+            <a:lstStyle/>
+            <a:p>
+              <a:r>
+                <a:rPr kumimoji="1" lang="en-US" altLang="zh-CN" b="1" dirty="0">
+                  <a:solidFill>
+                    <a:srgbClr val="FF0000"/>
+                  </a:solidFill>
+                  <a:latin typeface="Times New Roman" panose="02020603050405020304" pitchFamily="18" charset="0"/>
+                  <a:cs typeface="Times New Roman" panose="02020603050405020304" pitchFamily="18" charset="0"/>
+                </a:rPr>
+                <a:t>Compile</a:t>
+              </a:r>
+              <a:endParaRPr kumimoji="1" lang="zh-CN" altLang="en-US" b="1" dirty="0">
+                <a:solidFill>
+                  <a:srgbClr val="FF0000"/>
+                </a:solidFill>
+                <a:latin typeface="Times New Roman" panose="02020603050405020304" pitchFamily="18" charset="0"/>
+                <a:cs typeface="Times New Roman" panose="02020603050405020304" pitchFamily="18" charset="0"/>
+              </a:endParaRPr>
+            </a:p>
+          </p:txBody>
+        </p:sp>
+        <p:sp>
+          <p:nvSpPr>
+            <p:cNvPr id="24" name="文本框 23">
+              <a:extLst>
+                <a:ext uri="{FF2B5EF4-FFF2-40B4-BE49-F238E27FC236}">
+                  <a16:creationId xmlns:a16="http://schemas.microsoft.com/office/drawing/2014/main" id="{55E49751-E619-682D-7062-2639F4A37E09}"/>
+                </a:ext>
+              </a:extLst>
+            </p:cNvPr>
+            <p:cNvSpPr txBox="1"/>
+            <p:nvPr/>
+          </p:nvSpPr>
+          <p:spPr>
+            <a:xfrm>
+              <a:off x="7639964" y="2623544"/>
+              <a:ext cx="1223412" cy="369332"/>
+            </a:xfrm>
+            <a:prstGeom prst="rect">
+              <a:avLst/>
+            </a:prstGeom>
+            <a:noFill/>
+          </p:spPr>
+          <p:txBody>
+            <a:bodyPr wrap="none" rtlCol="0">
+              <a:spAutoFit/>
+            </a:bodyPr>
+            <a:lstStyle/>
+            <a:p>
+              <a:r>
+                <a:rPr kumimoji="1" lang="en-US" altLang="zh-CN" b="1" dirty="0">
+                  <a:solidFill>
+                    <a:srgbClr val="FF0000"/>
+                  </a:solidFill>
+                  <a:latin typeface="Times New Roman" panose="02020603050405020304" pitchFamily="18" charset="0"/>
+                  <a:cs typeface="Times New Roman" panose="02020603050405020304" pitchFamily="18" charset="0"/>
+                </a:rPr>
+                <a:t>Decompile</a:t>
+              </a:r>
+              <a:endParaRPr kumimoji="1" lang="zh-CN" altLang="en-US" b="1" dirty="0">
+                <a:solidFill>
+                  <a:srgbClr val="FF0000"/>
+                </a:solidFill>
+                <a:latin typeface="Times New Roman" panose="02020603050405020304" pitchFamily="18" charset="0"/>
+                <a:cs typeface="Times New Roman" panose="02020603050405020304" pitchFamily="18" charset="0"/>
+              </a:endParaRPr>
+            </a:p>
+          </p:txBody>
+        </p:sp>
+        <p:sp>
+          <p:nvSpPr>
+            <p:cNvPr id="26" name="左大括号 25">
+              <a:extLst>
+                <a:ext uri="{FF2B5EF4-FFF2-40B4-BE49-F238E27FC236}">
+                  <a16:creationId xmlns:a16="http://schemas.microsoft.com/office/drawing/2014/main" id="{EEED2EDB-AA8C-8A92-326E-38A7EDFD5E52}"/>
+                </a:ext>
+              </a:extLst>
+            </p:cNvPr>
+            <p:cNvSpPr/>
+            <p:nvPr/>
+          </p:nvSpPr>
+          <p:spPr>
+            <a:xfrm>
+              <a:off x="3838619" y="3229543"/>
+              <a:ext cx="410488" cy="2659310"/>
+            </a:xfrm>
+            <a:prstGeom prst="leftBrace">
+              <a:avLst/>
+            </a:prstGeom>
+          </p:spPr>
+          <p:style>
+            <a:lnRef idx="2">
+              <a:schemeClr val="accent1"/>
+            </a:lnRef>
+            <a:fillRef idx="0">
+              <a:schemeClr val="accent1"/>
+            </a:fillRef>
+            <a:effectRef idx="1">
+              <a:schemeClr val="accent1"/>
+            </a:effectRef>
+            <a:fontRef idx="minor">
+              <a:schemeClr val="tx1"/>
+            </a:fontRef>
+          </p:style>
+          <p:txBody>
+            <a:bodyPr rtlCol="0" anchor="ctr"/>
+            <a:lstStyle/>
+            <a:p>
+              <a:pPr algn="ctr"/>
+              <a:endParaRPr kumimoji="1" lang="zh-CN" altLang="en-US">
+                <a:latin typeface="Times New Roman" panose="02020603050405020304" pitchFamily="18" charset="0"/>
+                <a:cs typeface="Times New Roman" panose="02020603050405020304" pitchFamily="18" charset="0"/>
+              </a:endParaRPr>
+            </a:p>
+          </p:txBody>
+        </p:sp>
+        <p:sp>
+          <p:nvSpPr>
+            <p:cNvPr id="27" name="文本框 26">
+              <a:extLst>
+                <a:ext uri="{FF2B5EF4-FFF2-40B4-BE49-F238E27FC236}">
+                  <a16:creationId xmlns:a16="http://schemas.microsoft.com/office/drawing/2014/main" id="{1E4AE626-87EC-1ACA-CE3E-B1FB66C236B7}"/>
+                </a:ext>
+              </a:extLst>
+            </p:cNvPr>
+            <p:cNvSpPr txBox="1"/>
+            <p:nvPr/>
+          </p:nvSpPr>
+          <p:spPr>
+            <a:xfrm>
+              <a:off x="4249107" y="3229543"/>
+              <a:ext cx="816249" cy="369332"/>
+            </a:xfrm>
+            <a:prstGeom prst="rect">
+              <a:avLst/>
+            </a:prstGeom>
+            <a:noFill/>
+          </p:spPr>
+          <p:txBody>
+            <a:bodyPr wrap="none" rtlCol="0">
+              <a:spAutoFit/>
+            </a:bodyPr>
+            <a:lstStyle/>
+            <a:p>
+              <a:r>
+                <a:rPr kumimoji="1" lang="en-US" altLang="zh-CN" dirty="0">
+                  <a:latin typeface="Times New Roman" panose="02020603050405020304" pitchFamily="18" charset="0"/>
+                  <a:cs typeface="Times New Roman" panose="02020603050405020304" pitchFamily="18" charset="0"/>
+                </a:rPr>
+                <a:t>C/C++</a:t>
+              </a:r>
+              <a:endParaRPr kumimoji="1" lang="zh-CN" altLang="en-US" dirty="0">
+                <a:latin typeface="Times New Roman" panose="02020603050405020304" pitchFamily="18" charset="0"/>
+                <a:cs typeface="Times New Roman" panose="02020603050405020304" pitchFamily="18" charset="0"/>
+              </a:endParaRPr>
+            </a:p>
+          </p:txBody>
+        </p:sp>
+        <p:sp>
+          <p:nvSpPr>
+            <p:cNvPr id="28" name="文本框 27">
+              <a:extLst>
+                <a:ext uri="{FF2B5EF4-FFF2-40B4-BE49-F238E27FC236}">
+                  <a16:creationId xmlns:a16="http://schemas.microsoft.com/office/drawing/2014/main" id="{187E81E6-E79B-2146-065C-A4823F883BC6}"/>
+                </a:ext>
+              </a:extLst>
+            </p:cNvPr>
+            <p:cNvSpPr txBox="1"/>
+            <p:nvPr/>
+          </p:nvSpPr>
+          <p:spPr>
+            <a:xfrm>
+              <a:off x="4249107" y="3775191"/>
+              <a:ext cx="1313180" cy="369332"/>
+            </a:xfrm>
+            <a:prstGeom prst="rect">
+              <a:avLst/>
+            </a:prstGeom>
+            <a:noFill/>
+          </p:spPr>
+          <p:txBody>
+            <a:bodyPr wrap="none" rtlCol="0">
+              <a:spAutoFit/>
+            </a:bodyPr>
+            <a:lstStyle/>
+            <a:p>
+              <a:r>
+                <a:rPr kumimoji="1" lang="en-US" altLang="zh-CN" dirty="0">
+                  <a:latin typeface="Times New Roman" panose="02020603050405020304" pitchFamily="18" charset="0"/>
+                  <a:cs typeface="Times New Roman" panose="02020603050405020304" pitchFamily="18" charset="0"/>
+                </a:rPr>
+                <a:t>Java/Python</a:t>
+              </a:r>
+              <a:endParaRPr kumimoji="1" lang="zh-CN" altLang="en-US" dirty="0">
+                <a:latin typeface="Times New Roman" panose="02020603050405020304" pitchFamily="18" charset="0"/>
+                <a:cs typeface="Times New Roman" panose="02020603050405020304" pitchFamily="18" charset="0"/>
+              </a:endParaRPr>
+            </a:p>
+          </p:txBody>
+        </p:sp>
+        <p:sp>
+          <p:nvSpPr>
+            <p:cNvPr id="29" name="文本框 28">
+              <a:extLst>
+                <a:ext uri="{FF2B5EF4-FFF2-40B4-BE49-F238E27FC236}">
+                  <a16:creationId xmlns:a16="http://schemas.microsoft.com/office/drawing/2014/main" id="{1ABBD0AC-8508-2C35-A877-74B4782AB5A5}"/>
+                </a:ext>
+              </a:extLst>
+            </p:cNvPr>
+            <p:cNvSpPr txBox="1"/>
+            <p:nvPr/>
+          </p:nvSpPr>
+          <p:spPr>
+            <a:xfrm>
+              <a:off x="4249107" y="4379998"/>
+              <a:ext cx="838691" cy="369332"/>
+            </a:xfrm>
+            <a:prstGeom prst="rect">
+              <a:avLst/>
+            </a:prstGeom>
+            <a:noFill/>
+          </p:spPr>
+          <p:txBody>
+            <a:bodyPr wrap="none" rtlCol="0">
+              <a:spAutoFit/>
+            </a:bodyPr>
+            <a:lstStyle/>
+            <a:p>
+              <a:r>
+                <a:rPr kumimoji="1" lang="en-US" altLang="zh-CN" dirty="0">
+                  <a:latin typeface="Times New Roman" panose="02020603050405020304" pitchFamily="18" charset="0"/>
+                  <a:cs typeface="Times New Roman" panose="02020603050405020304" pitchFamily="18" charset="0"/>
+                </a:rPr>
+                <a:t>CUDA</a:t>
+              </a:r>
+              <a:endParaRPr kumimoji="1" lang="zh-CN" altLang="en-US" dirty="0">
+                <a:latin typeface="Times New Roman" panose="02020603050405020304" pitchFamily="18" charset="0"/>
+                <a:cs typeface="Times New Roman" panose="02020603050405020304" pitchFamily="18" charset="0"/>
+              </a:endParaRPr>
+            </a:p>
+          </p:txBody>
+        </p:sp>
+        <p:sp>
+          <p:nvSpPr>
+            <p:cNvPr id="30" name="文本框 29">
+              <a:extLst>
+                <a:ext uri="{FF2B5EF4-FFF2-40B4-BE49-F238E27FC236}">
+                  <a16:creationId xmlns:a16="http://schemas.microsoft.com/office/drawing/2014/main" id="{FE8093B8-C380-883B-82C3-9FF4D6126F9F}"/>
+                </a:ext>
+              </a:extLst>
+            </p:cNvPr>
+            <p:cNvSpPr txBox="1"/>
+            <p:nvPr/>
+          </p:nvSpPr>
+          <p:spPr>
+            <a:xfrm>
+              <a:off x="4258724" y="4984805"/>
+              <a:ext cx="768159" cy="369332"/>
+            </a:xfrm>
+            <a:prstGeom prst="rect">
+              <a:avLst/>
+            </a:prstGeom>
+            <a:noFill/>
+          </p:spPr>
+          <p:txBody>
+            <a:bodyPr wrap="none" rtlCol="0">
+              <a:spAutoFit/>
+            </a:bodyPr>
+            <a:lstStyle/>
+            <a:p>
+              <a:r>
+                <a:rPr kumimoji="1" lang="en-US" altLang="zh-CN" dirty="0">
+                  <a:latin typeface="Times New Roman" panose="02020603050405020304" pitchFamily="18" charset="0"/>
+                  <a:cs typeface="Times New Roman" panose="02020603050405020304" pitchFamily="18" charset="0"/>
+                </a:rPr>
+                <a:t>Triton</a:t>
+              </a:r>
+              <a:endParaRPr kumimoji="1" lang="zh-CN" altLang="en-US" dirty="0">
+                <a:latin typeface="Times New Roman" panose="02020603050405020304" pitchFamily="18" charset="0"/>
+                <a:cs typeface="Times New Roman" panose="02020603050405020304" pitchFamily="18" charset="0"/>
+              </a:endParaRPr>
+            </a:p>
+          </p:txBody>
+        </p:sp>
+        <p:sp>
+          <p:nvSpPr>
+            <p:cNvPr id="32" name="文本框 31">
+              <a:extLst>
+                <a:ext uri="{FF2B5EF4-FFF2-40B4-BE49-F238E27FC236}">
+                  <a16:creationId xmlns:a16="http://schemas.microsoft.com/office/drawing/2014/main" id="{396F0E71-92BC-146B-7F13-9048911DFEBB}"/>
+                </a:ext>
+              </a:extLst>
+            </p:cNvPr>
+            <p:cNvSpPr txBox="1"/>
+            <p:nvPr/>
+          </p:nvSpPr>
+          <p:spPr>
+            <a:xfrm>
+              <a:off x="4301010" y="5519521"/>
+              <a:ext cx="692818" cy="369332"/>
+            </a:xfrm>
+            <a:prstGeom prst="rect">
+              <a:avLst/>
+            </a:prstGeom>
+            <a:noFill/>
+          </p:spPr>
+          <p:txBody>
+            <a:bodyPr wrap="none" rtlCol="0">
+              <a:spAutoFit/>
+            </a:bodyPr>
+            <a:lstStyle/>
+            <a:p>
+              <a:r>
+                <a:rPr kumimoji="1" lang="en-US" altLang="zh-CN" dirty="0" err="1">
+                  <a:latin typeface="Times New Roman" panose="02020603050405020304" pitchFamily="18" charset="0"/>
+                  <a:cs typeface="Times New Roman" panose="02020603050405020304" pitchFamily="18" charset="0"/>
+                </a:rPr>
+                <a:t>CuTe</a:t>
+              </a:r>
+              <a:endParaRPr kumimoji="1" lang="zh-CN" altLang="en-US" dirty="0">
+                <a:latin typeface="Times New Roman" panose="02020603050405020304" pitchFamily="18" charset="0"/>
+                <a:cs typeface="Times New Roman" panose="02020603050405020304" pitchFamily="18" charset="0"/>
+              </a:endParaRPr>
+            </a:p>
+          </p:txBody>
+        </p:sp>
+        <p:sp>
+          <p:nvSpPr>
+            <p:cNvPr id="33" name="左弧形箭头 32">
+              <a:extLst>
+                <a:ext uri="{FF2B5EF4-FFF2-40B4-BE49-F238E27FC236}">
+                  <a16:creationId xmlns:a16="http://schemas.microsoft.com/office/drawing/2014/main" id="{9C6FA51D-6761-08B0-C22D-007560C25531}"/>
+                </a:ext>
+              </a:extLst>
+            </p:cNvPr>
+            <p:cNvSpPr/>
+            <p:nvPr/>
+          </p:nvSpPr>
+          <p:spPr>
+            <a:xfrm>
+              <a:off x="5233816" y="3621702"/>
+              <a:ext cx="573438" cy="1350301"/>
+            </a:xfrm>
+            <a:prstGeom prst="curvedLeftArrow">
+              <a:avLst/>
+            </a:prstGeom>
+          </p:spPr>
+          <p:style>
+            <a:lnRef idx="2">
+              <a:schemeClr val="accent1">
+                <a:shade val="15000"/>
+              </a:schemeClr>
+            </a:lnRef>
+            <a:fillRef idx="1">
+              <a:schemeClr val="accent1"/>
+            </a:fillRef>
+            <a:effectRef idx="0">
+              <a:schemeClr val="accent1"/>
+            </a:effectRef>
+            <a:fontRef idx="minor">
+              <a:schemeClr val="lt1"/>
+            </a:fontRef>
+          </p:style>
+          <p:txBody>
+            <a:bodyPr rtlCol="0" anchor="ctr"/>
+            <a:lstStyle/>
+            <a:p>
+              <a:pPr algn="ctr"/>
+              <a:endParaRPr kumimoji="1" lang="zh-CN" altLang="en-US">
                 <a:solidFill>
                   <a:schemeClr val="tx1"/>
                 </a:solidFill>
-              </a:rPr>
-              <a:t>Language</a:t>
-            </a:r>
-            <a:endParaRPr kumimoji="1" lang="zh-CN" altLang="en-US" dirty="0">
-              <a:solidFill>
-                <a:schemeClr val="tx1"/>
-              </a:solidFill>
-            </a:endParaRPr>
-          </a:p>
-        </p:txBody>
-      </p:sp>
-      <p:sp>
-        <p:nvSpPr>
-          <p:cNvPr id="15" name="矩形 14">
-            <a:extLst>
-              <a:ext uri="{FF2B5EF4-FFF2-40B4-BE49-F238E27FC236}">
-                <a16:creationId xmlns:a16="http://schemas.microsoft.com/office/drawing/2014/main" id="{87EBD3BA-5BA9-DAEB-B71B-8ED85B9C11B6}"/>
-              </a:ext>
-            </a:extLst>
-          </p:cNvPr>
-          <p:cNvSpPr/>
-          <p:nvPr/>
-        </p:nvSpPr>
-        <p:spPr>
-          <a:xfrm>
-            <a:off x="8229806" y="1344057"/>
-            <a:ext cx="2236424" cy="1200839"/>
-          </a:xfrm>
-          <a:prstGeom prst="rect">
-            <a:avLst/>
-          </a:prstGeom>
-          <a:noFill/>
-        </p:spPr>
-        <p:style>
-          <a:lnRef idx="2">
-            <a:schemeClr val="accent1">
-              <a:shade val="15000"/>
-            </a:schemeClr>
-          </a:lnRef>
-          <a:fillRef idx="1">
-            <a:schemeClr val="accent1"/>
-          </a:fillRef>
-          <a:effectRef idx="0">
-            <a:schemeClr val="accent1"/>
-          </a:effectRef>
-          <a:fontRef idx="minor">
-            <a:schemeClr val="lt1"/>
-          </a:fontRef>
-        </p:style>
-        <p:txBody>
-          <a:bodyPr rtlCol="0" anchor="ctr"/>
-          <a:lstStyle/>
-          <a:p>
-            <a:pPr algn="ctr"/>
-            <a:r>
-              <a:rPr kumimoji="1" lang="en-US" altLang="zh-CN" dirty="0">
+                <a:latin typeface="Times New Roman" panose="02020603050405020304" pitchFamily="18" charset="0"/>
+                <a:cs typeface="Times New Roman" panose="02020603050405020304" pitchFamily="18" charset="0"/>
+              </a:endParaRPr>
+            </a:p>
+          </p:txBody>
+        </p:sp>
+        <p:sp>
+          <p:nvSpPr>
+            <p:cNvPr id="34" name="文本框 33">
+              <a:extLst>
+                <a:ext uri="{FF2B5EF4-FFF2-40B4-BE49-F238E27FC236}">
+                  <a16:creationId xmlns:a16="http://schemas.microsoft.com/office/drawing/2014/main" id="{6330FCDE-A380-6F1D-7520-9E5BB502D5B2}"/>
+                </a:ext>
+              </a:extLst>
+            </p:cNvPr>
+            <p:cNvSpPr txBox="1"/>
+            <p:nvPr/>
+          </p:nvSpPr>
+          <p:spPr>
+            <a:xfrm>
+              <a:off x="5540956" y="3382478"/>
+              <a:ext cx="1514069" cy="369332"/>
+            </a:xfrm>
+            <a:prstGeom prst="rect">
+              <a:avLst/>
+            </a:prstGeom>
+            <a:noFill/>
+          </p:spPr>
+          <p:txBody>
+            <a:bodyPr wrap="none" rtlCol="0">
+              <a:spAutoFit/>
+            </a:bodyPr>
+            <a:lstStyle/>
+            <a:p>
+              <a:r>
+                <a:rPr kumimoji="1" lang="en-US" altLang="zh-CN" b="1" dirty="0" err="1">
+                  <a:solidFill>
+                    <a:srgbClr val="FF0000"/>
+                  </a:solidFill>
+                  <a:latin typeface="Times New Roman" panose="02020603050405020304" pitchFamily="18" charset="0"/>
+                  <a:cs typeface="Times New Roman" panose="02020603050405020304" pitchFamily="18" charset="0"/>
+                </a:rPr>
+                <a:t>Transpilation</a:t>
+              </a:r>
+              <a:endParaRPr kumimoji="1" lang="zh-CN" altLang="en-US" b="1" dirty="0">
+                <a:solidFill>
+                  <a:srgbClr val="FF0000"/>
+                </a:solidFill>
+                <a:latin typeface="Times New Roman" panose="02020603050405020304" pitchFamily="18" charset="0"/>
+                <a:cs typeface="Times New Roman" panose="02020603050405020304" pitchFamily="18" charset="0"/>
+              </a:endParaRPr>
+            </a:p>
+          </p:txBody>
+        </p:sp>
+        <p:sp>
+          <p:nvSpPr>
+            <p:cNvPr id="35" name="文本框 34">
+              <a:extLst>
+                <a:ext uri="{FF2B5EF4-FFF2-40B4-BE49-F238E27FC236}">
+                  <a16:creationId xmlns:a16="http://schemas.microsoft.com/office/drawing/2014/main" id="{04037325-2CF4-579A-86C9-0D74CDA95566}"/>
+                </a:ext>
+              </a:extLst>
+            </p:cNvPr>
+            <p:cNvSpPr txBox="1"/>
+            <p:nvPr/>
+          </p:nvSpPr>
+          <p:spPr>
+            <a:xfrm>
+              <a:off x="5786451" y="3885542"/>
+              <a:ext cx="1649811" cy="369332"/>
+            </a:xfrm>
+            <a:prstGeom prst="rect">
+              <a:avLst/>
+            </a:prstGeom>
+            <a:noFill/>
+          </p:spPr>
+          <p:txBody>
+            <a:bodyPr wrap="none" rtlCol="0">
+              <a:spAutoFit/>
+            </a:bodyPr>
+            <a:lstStyle/>
+            <a:p>
+              <a:r>
+                <a:rPr kumimoji="1" lang="en-US" altLang="zh-CN" dirty="0" err="1">
+                  <a:latin typeface="Times New Roman" panose="02020603050405020304" pitchFamily="18" charset="0"/>
+                  <a:cs typeface="Times New Roman" panose="02020603050405020304" pitchFamily="18" charset="0"/>
+                </a:rPr>
+                <a:t>AutoParallelize</a:t>
+              </a:r>
+              <a:endParaRPr kumimoji="1" lang="en-US" altLang="zh-CN" dirty="0">
+                <a:latin typeface="Times New Roman" panose="02020603050405020304" pitchFamily="18" charset="0"/>
+                <a:cs typeface="Times New Roman" panose="02020603050405020304" pitchFamily="18" charset="0"/>
+              </a:endParaRPr>
+            </a:p>
+          </p:txBody>
+        </p:sp>
+        <p:sp>
+          <p:nvSpPr>
+            <p:cNvPr id="38" name="文本框 37">
+              <a:extLst>
+                <a:ext uri="{FF2B5EF4-FFF2-40B4-BE49-F238E27FC236}">
+                  <a16:creationId xmlns:a16="http://schemas.microsoft.com/office/drawing/2014/main" id="{52699486-3E7D-0FB8-1FD9-F477EE5458B7}"/>
+                </a:ext>
+              </a:extLst>
+            </p:cNvPr>
+            <p:cNvSpPr txBox="1"/>
+            <p:nvPr/>
+          </p:nvSpPr>
+          <p:spPr>
+            <a:xfrm>
+              <a:off x="5405005" y="4953248"/>
+              <a:ext cx="2070170" cy="381430"/>
+            </a:xfrm>
+            <a:prstGeom prst="rect">
+              <a:avLst/>
+            </a:prstGeom>
+            <a:noFill/>
+          </p:spPr>
+          <p:txBody>
+            <a:bodyPr wrap="square" rtlCol="0">
+              <a:spAutoFit/>
+            </a:bodyPr>
+            <a:lstStyle/>
+            <a:p>
+              <a:r>
+                <a:rPr kumimoji="1" lang="en-US" altLang="zh-CN" b="1" dirty="0">
+                  <a:solidFill>
+                    <a:srgbClr val="FF0000"/>
+                  </a:solidFill>
+                  <a:latin typeface="Times New Roman" panose="02020603050405020304" pitchFamily="18" charset="0"/>
+                  <a:cs typeface="Times New Roman" panose="02020603050405020304" pitchFamily="18" charset="0"/>
+                </a:rPr>
+                <a:t>Code Optimization</a:t>
+              </a:r>
+              <a:endParaRPr kumimoji="1" lang="zh-CN" altLang="en-US" b="1" dirty="0">
+                <a:solidFill>
+                  <a:srgbClr val="FF0000"/>
+                </a:solidFill>
+                <a:latin typeface="Times New Roman" panose="02020603050405020304" pitchFamily="18" charset="0"/>
+                <a:cs typeface="Times New Roman" panose="02020603050405020304" pitchFamily="18" charset="0"/>
+              </a:endParaRPr>
+            </a:p>
+          </p:txBody>
+        </p:sp>
+        <p:sp>
+          <p:nvSpPr>
+            <p:cNvPr id="40" name="左大括号 39">
+              <a:extLst>
+                <a:ext uri="{FF2B5EF4-FFF2-40B4-BE49-F238E27FC236}">
+                  <a16:creationId xmlns:a16="http://schemas.microsoft.com/office/drawing/2014/main" id="{A9CF007B-72DB-3382-76AA-22886CBEC48F}"/>
+                </a:ext>
+              </a:extLst>
+            </p:cNvPr>
+            <p:cNvSpPr/>
+            <p:nvPr/>
+          </p:nvSpPr>
+          <p:spPr>
+            <a:xfrm>
+              <a:off x="8418499" y="3211871"/>
+              <a:ext cx="410488" cy="2659310"/>
+            </a:xfrm>
+            <a:prstGeom prst="leftBrace">
+              <a:avLst/>
+            </a:prstGeom>
+          </p:spPr>
+          <p:style>
+            <a:lnRef idx="2">
+              <a:schemeClr val="accent1"/>
+            </a:lnRef>
+            <a:fillRef idx="0">
+              <a:schemeClr val="accent1"/>
+            </a:fillRef>
+            <a:effectRef idx="1">
+              <a:schemeClr val="accent1"/>
+            </a:effectRef>
+            <a:fontRef idx="minor">
+              <a:schemeClr val="tx1"/>
+            </a:fontRef>
+          </p:style>
+          <p:txBody>
+            <a:bodyPr rtlCol="0" anchor="ctr"/>
+            <a:lstStyle/>
+            <a:p>
+              <a:pPr algn="ctr"/>
+              <a:endParaRPr kumimoji="1" lang="zh-CN" altLang="en-US">
+                <a:latin typeface="Times New Roman" panose="02020603050405020304" pitchFamily="18" charset="0"/>
+                <a:cs typeface="Times New Roman" panose="02020603050405020304" pitchFamily="18" charset="0"/>
+              </a:endParaRPr>
+            </a:p>
+          </p:txBody>
+        </p:sp>
+        <p:sp>
+          <p:nvSpPr>
+            <p:cNvPr id="41" name="文本框 40">
+              <a:extLst>
+                <a:ext uri="{FF2B5EF4-FFF2-40B4-BE49-F238E27FC236}">
+                  <a16:creationId xmlns:a16="http://schemas.microsoft.com/office/drawing/2014/main" id="{1EDC42D5-F61F-F676-CBE6-A9F4A51D55CD}"/>
+                </a:ext>
+              </a:extLst>
+            </p:cNvPr>
+            <p:cNvSpPr txBox="1"/>
+            <p:nvPr/>
+          </p:nvSpPr>
+          <p:spPr>
+            <a:xfrm>
+              <a:off x="8809350" y="3115918"/>
+              <a:ext cx="1106072" cy="369332"/>
+            </a:xfrm>
+            <a:prstGeom prst="rect">
+              <a:avLst/>
+            </a:prstGeom>
+            <a:noFill/>
+          </p:spPr>
+          <p:txBody>
+            <a:bodyPr wrap="none" rtlCol="0">
+              <a:spAutoFit/>
+            </a:bodyPr>
+            <a:lstStyle/>
+            <a:p>
+              <a:r>
+                <a:rPr kumimoji="1" lang="en-US" altLang="zh-CN" dirty="0">
+                  <a:latin typeface="Times New Roman" panose="02020603050405020304" pitchFamily="18" charset="0"/>
+                  <a:cs typeface="Times New Roman" panose="02020603050405020304" pitchFamily="18" charset="0"/>
+                </a:rPr>
+                <a:t>LLVM IR</a:t>
+              </a:r>
+              <a:endParaRPr kumimoji="1" lang="zh-CN" altLang="en-US" dirty="0">
+                <a:latin typeface="Times New Roman" panose="02020603050405020304" pitchFamily="18" charset="0"/>
+                <a:cs typeface="Times New Roman" panose="02020603050405020304" pitchFamily="18" charset="0"/>
+              </a:endParaRPr>
+            </a:p>
+          </p:txBody>
+        </p:sp>
+        <p:sp>
+          <p:nvSpPr>
+            <p:cNvPr id="42" name="文本框 41">
+              <a:extLst>
+                <a:ext uri="{FF2B5EF4-FFF2-40B4-BE49-F238E27FC236}">
+                  <a16:creationId xmlns:a16="http://schemas.microsoft.com/office/drawing/2014/main" id="{8F8F1CA0-298F-4331-D5E1-2762DE91B6D4}"/>
+                </a:ext>
+              </a:extLst>
+            </p:cNvPr>
+            <p:cNvSpPr txBox="1"/>
+            <p:nvPr/>
+          </p:nvSpPr>
+          <p:spPr>
+            <a:xfrm>
+              <a:off x="8809350" y="3651534"/>
+              <a:ext cx="529312" cy="369332"/>
+            </a:xfrm>
+            <a:prstGeom prst="rect">
+              <a:avLst/>
+            </a:prstGeom>
+            <a:noFill/>
+          </p:spPr>
+          <p:txBody>
+            <a:bodyPr wrap="none" rtlCol="0">
+              <a:spAutoFit/>
+            </a:bodyPr>
+            <a:lstStyle/>
+            <a:p>
+              <a:r>
+                <a:rPr kumimoji="1" lang="en-US" altLang="zh-CN" dirty="0">
+                  <a:latin typeface="Times New Roman" panose="02020603050405020304" pitchFamily="18" charset="0"/>
+                  <a:cs typeface="Times New Roman" panose="02020603050405020304" pitchFamily="18" charset="0"/>
+                </a:rPr>
+                <a:t>x86</a:t>
+              </a:r>
+              <a:endParaRPr kumimoji="1" lang="zh-CN" altLang="en-US" dirty="0">
+                <a:latin typeface="Times New Roman" panose="02020603050405020304" pitchFamily="18" charset="0"/>
+                <a:cs typeface="Times New Roman" panose="02020603050405020304" pitchFamily="18" charset="0"/>
+              </a:endParaRPr>
+            </a:p>
+          </p:txBody>
+        </p:sp>
+        <p:sp>
+          <p:nvSpPr>
+            <p:cNvPr id="43" name="文本框 42">
+              <a:extLst>
+                <a:ext uri="{FF2B5EF4-FFF2-40B4-BE49-F238E27FC236}">
+                  <a16:creationId xmlns:a16="http://schemas.microsoft.com/office/drawing/2014/main" id="{088C6281-5CE0-7E14-8E21-766B831DA2CA}"/>
+                </a:ext>
+              </a:extLst>
+            </p:cNvPr>
+            <p:cNvSpPr txBox="1"/>
+            <p:nvPr/>
+          </p:nvSpPr>
+          <p:spPr>
+            <a:xfrm>
+              <a:off x="8828987" y="4978317"/>
+              <a:ext cx="492443" cy="369332"/>
+            </a:xfrm>
+            <a:prstGeom prst="rect">
+              <a:avLst/>
+            </a:prstGeom>
+            <a:noFill/>
+          </p:spPr>
+          <p:txBody>
+            <a:bodyPr wrap="none" rtlCol="0">
+              <a:spAutoFit/>
+            </a:bodyPr>
+            <a:lstStyle/>
+            <a:p>
+              <a:r>
+                <a:rPr kumimoji="1" lang="en-US" altLang="zh-CN" dirty="0" err="1">
+                  <a:latin typeface="Times New Roman" panose="02020603050405020304" pitchFamily="18" charset="0"/>
+                  <a:cs typeface="Times New Roman" panose="02020603050405020304" pitchFamily="18" charset="0"/>
+                </a:rPr>
+                <a:t>ptx</a:t>
+              </a:r>
+              <a:endParaRPr kumimoji="1" lang="zh-CN" altLang="en-US" dirty="0">
+                <a:latin typeface="Times New Roman" panose="02020603050405020304" pitchFamily="18" charset="0"/>
+                <a:cs typeface="Times New Roman" panose="02020603050405020304" pitchFamily="18" charset="0"/>
+              </a:endParaRPr>
+            </a:p>
+          </p:txBody>
+        </p:sp>
+        <p:sp>
+          <p:nvSpPr>
+            <p:cNvPr id="44" name="文本框 43">
+              <a:extLst>
+                <a:ext uri="{FF2B5EF4-FFF2-40B4-BE49-F238E27FC236}">
+                  <a16:creationId xmlns:a16="http://schemas.microsoft.com/office/drawing/2014/main" id="{9592C534-CBE0-2B5A-4A45-4C9CCEA4C13A}"/>
+                </a:ext>
+              </a:extLst>
+            </p:cNvPr>
+            <p:cNvSpPr txBox="1"/>
+            <p:nvPr/>
+          </p:nvSpPr>
+          <p:spPr>
+            <a:xfrm>
+              <a:off x="8783292" y="4362326"/>
+              <a:ext cx="1095172" cy="369332"/>
+            </a:xfrm>
+            <a:prstGeom prst="rect">
+              <a:avLst/>
+            </a:prstGeom>
+            <a:noFill/>
+          </p:spPr>
+          <p:txBody>
+            <a:bodyPr wrap="none" rtlCol="0">
+              <a:spAutoFit/>
+            </a:bodyPr>
+            <a:lstStyle/>
+            <a:p>
+              <a:r>
+                <a:rPr kumimoji="1" lang="en-US" altLang="zh-CN" dirty="0">
+                  <a:latin typeface="Times New Roman" panose="02020603050405020304" pitchFamily="18" charset="0"/>
+                  <a:cs typeface="Times New Roman" panose="02020603050405020304" pitchFamily="18" charset="0"/>
+                </a:rPr>
+                <a:t>arm/</a:t>
+              </a:r>
+              <a:r>
+                <a:rPr kumimoji="1" lang="en-US" altLang="zh-CN" dirty="0" err="1">
+                  <a:latin typeface="Times New Roman" panose="02020603050405020304" pitchFamily="18" charset="0"/>
+                  <a:cs typeface="Times New Roman" panose="02020603050405020304" pitchFamily="18" charset="0"/>
+                </a:rPr>
+                <a:t>riscv</a:t>
+              </a:r>
+              <a:endParaRPr kumimoji="1" lang="zh-CN" altLang="en-US" dirty="0">
+                <a:latin typeface="Times New Roman" panose="02020603050405020304" pitchFamily="18" charset="0"/>
+                <a:cs typeface="Times New Roman" panose="02020603050405020304" pitchFamily="18" charset="0"/>
+              </a:endParaRPr>
+            </a:p>
+          </p:txBody>
+        </p:sp>
+        <p:sp>
+          <p:nvSpPr>
+            <p:cNvPr id="47" name="左弧形箭头 46">
+              <a:extLst>
+                <a:ext uri="{FF2B5EF4-FFF2-40B4-BE49-F238E27FC236}">
+                  <a16:creationId xmlns:a16="http://schemas.microsoft.com/office/drawing/2014/main" id="{3451B993-EA95-B518-8049-0A8169B0F6CB}"/>
+                </a:ext>
+              </a:extLst>
+            </p:cNvPr>
+            <p:cNvSpPr/>
+            <p:nvPr/>
+          </p:nvSpPr>
+          <p:spPr>
+            <a:xfrm>
+              <a:off x="9638943" y="3866375"/>
+              <a:ext cx="573438" cy="1350301"/>
+            </a:xfrm>
+            <a:prstGeom prst="curvedLeftArrow">
+              <a:avLst/>
+            </a:prstGeom>
+          </p:spPr>
+          <p:style>
+            <a:lnRef idx="2">
+              <a:schemeClr val="accent1">
+                <a:shade val="15000"/>
+              </a:schemeClr>
+            </a:lnRef>
+            <a:fillRef idx="1">
+              <a:schemeClr val="accent1"/>
+            </a:fillRef>
+            <a:effectRef idx="0">
+              <a:schemeClr val="accent1"/>
+            </a:effectRef>
+            <a:fontRef idx="minor">
+              <a:schemeClr val="lt1"/>
+            </a:fontRef>
+          </p:style>
+          <p:txBody>
+            <a:bodyPr rtlCol="0" anchor="ctr"/>
+            <a:lstStyle/>
+            <a:p>
+              <a:pPr algn="ctr"/>
+              <a:endParaRPr kumimoji="1" lang="zh-CN" altLang="en-US">
                 <a:solidFill>
                   <a:schemeClr val="tx1"/>
                 </a:solidFill>
-              </a:rPr>
-              <a:t>Low Level</a:t>
-            </a:r>
-          </a:p>
-          <a:p>
-            <a:pPr algn="ctr"/>
-            <a:r>
-              <a:rPr kumimoji="1" lang="en-US" altLang="zh-CN" dirty="0">
-                <a:solidFill>
-                  <a:schemeClr val="tx1"/>
-                </a:solidFill>
-              </a:rPr>
-              <a:t>IR/Assembly</a:t>
-            </a:r>
-          </a:p>
-          <a:p>
-            <a:pPr algn="ctr"/>
-            <a:r>
-              <a:rPr kumimoji="1" lang="en-US" altLang="zh-CN" dirty="0">
-                <a:solidFill>
-                  <a:schemeClr val="tx1"/>
-                </a:solidFill>
-              </a:rPr>
-              <a:t>Language</a:t>
-            </a:r>
-            <a:endParaRPr kumimoji="1" lang="zh-CN" altLang="en-US" dirty="0">
-              <a:solidFill>
-                <a:schemeClr val="tx1"/>
-              </a:solidFill>
-            </a:endParaRPr>
-          </a:p>
-        </p:txBody>
-      </p:sp>
-      <p:sp>
-        <p:nvSpPr>
-          <p:cNvPr id="16" name="右箭头 15">
-            <a:extLst>
-              <a:ext uri="{FF2B5EF4-FFF2-40B4-BE49-F238E27FC236}">
-                <a16:creationId xmlns:a16="http://schemas.microsoft.com/office/drawing/2014/main" id="{C9B37F20-A39B-5E7A-FE7E-04CEEAE1F5E4}"/>
-              </a:ext>
-            </a:extLst>
-          </p:cNvPr>
-          <p:cNvSpPr/>
-          <p:nvPr/>
-        </p:nvSpPr>
-        <p:spPr>
-          <a:xfrm>
-            <a:off x="2473558" y="1415412"/>
-            <a:ext cx="1280160" cy="381430"/>
-          </a:xfrm>
-          <a:prstGeom prst="rightArrow">
-            <a:avLst/>
-          </a:prstGeom>
-        </p:spPr>
-        <p:style>
-          <a:lnRef idx="2">
-            <a:schemeClr val="accent1">
-              <a:shade val="15000"/>
-            </a:schemeClr>
-          </a:lnRef>
-          <a:fillRef idx="1">
-            <a:schemeClr val="accent1"/>
-          </a:fillRef>
-          <a:effectRef idx="0">
-            <a:schemeClr val="accent1"/>
-          </a:effectRef>
-          <a:fontRef idx="minor">
-            <a:schemeClr val="lt1"/>
-          </a:fontRef>
-        </p:style>
-        <p:txBody>
-          <a:bodyPr rtlCol="0" anchor="ctr"/>
-          <a:lstStyle/>
-          <a:p>
-            <a:pPr algn="ctr"/>
-            <a:endParaRPr kumimoji="1" lang="zh-CN" altLang="en-US"/>
-          </a:p>
-        </p:txBody>
-      </p:sp>
-      <p:sp>
-        <p:nvSpPr>
-          <p:cNvPr id="17" name="文本框 16">
-            <a:extLst>
-              <a:ext uri="{FF2B5EF4-FFF2-40B4-BE49-F238E27FC236}">
-                <a16:creationId xmlns:a16="http://schemas.microsoft.com/office/drawing/2014/main" id="{514795CC-E9B5-E6A4-ACE5-44CA6CCEEF2A}"/>
-              </a:ext>
-            </a:extLst>
-          </p:cNvPr>
-          <p:cNvSpPr txBox="1"/>
-          <p:nvPr/>
-        </p:nvSpPr>
-        <p:spPr>
-          <a:xfrm>
-            <a:off x="2049787" y="1006157"/>
-            <a:ext cx="1850186" cy="369332"/>
-          </a:xfrm>
-          <a:prstGeom prst="rect">
-            <a:avLst/>
-          </a:prstGeom>
-          <a:noFill/>
-        </p:spPr>
-        <p:txBody>
-          <a:bodyPr wrap="none" rtlCol="0">
-            <a:spAutoFit/>
-          </a:bodyPr>
-          <a:lstStyle/>
-          <a:p>
-            <a:r>
-              <a:rPr kumimoji="1" lang="en-US" altLang="zh-CN" dirty="0"/>
-              <a:t>Code generation</a:t>
-            </a:r>
-            <a:endParaRPr kumimoji="1" lang="zh-CN" altLang="en-US" dirty="0"/>
-          </a:p>
-        </p:txBody>
-      </p:sp>
-      <p:sp>
-        <p:nvSpPr>
-          <p:cNvPr id="18" name="右箭头 17">
-            <a:extLst>
-              <a:ext uri="{FF2B5EF4-FFF2-40B4-BE49-F238E27FC236}">
-                <a16:creationId xmlns:a16="http://schemas.microsoft.com/office/drawing/2014/main" id="{D2F2D2FF-53B4-F09A-155F-F53A6C542123}"/>
-              </a:ext>
-            </a:extLst>
-          </p:cNvPr>
-          <p:cNvSpPr/>
-          <p:nvPr/>
-        </p:nvSpPr>
-        <p:spPr>
-          <a:xfrm rot="10800000">
-            <a:off x="2473558" y="2234821"/>
-            <a:ext cx="1280160" cy="381430"/>
-          </a:xfrm>
-          <a:prstGeom prst="rightArrow">
-            <a:avLst/>
-          </a:prstGeom>
-        </p:spPr>
-        <p:style>
-          <a:lnRef idx="2">
-            <a:schemeClr val="accent1">
-              <a:shade val="15000"/>
-            </a:schemeClr>
-          </a:lnRef>
-          <a:fillRef idx="1">
-            <a:schemeClr val="accent1"/>
-          </a:fillRef>
-          <a:effectRef idx="0">
-            <a:schemeClr val="accent1"/>
-          </a:effectRef>
-          <a:fontRef idx="minor">
-            <a:schemeClr val="lt1"/>
-          </a:fontRef>
-        </p:style>
-        <p:txBody>
-          <a:bodyPr rtlCol="0" anchor="ctr"/>
-          <a:lstStyle/>
-          <a:p>
-            <a:pPr algn="ctr"/>
-            <a:endParaRPr kumimoji="1" lang="zh-CN" altLang="en-US"/>
-          </a:p>
-        </p:txBody>
-      </p:sp>
-      <p:sp>
-        <p:nvSpPr>
-          <p:cNvPr id="19" name="文本框 18">
-            <a:extLst>
-              <a:ext uri="{FF2B5EF4-FFF2-40B4-BE49-F238E27FC236}">
-                <a16:creationId xmlns:a16="http://schemas.microsoft.com/office/drawing/2014/main" id="{E5A6E9EE-75FA-715B-B85D-7685CF480AB4}"/>
-              </a:ext>
-            </a:extLst>
-          </p:cNvPr>
-          <p:cNvSpPr txBox="1"/>
-          <p:nvPr/>
-        </p:nvSpPr>
-        <p:spPr>
-          <a:xfrm>
-            <a:off x="1574889" y="2684898"/>
-            <a:ext cx="2313454" cy="369332"/>
-          </a:xfrm>
-          <a:prstGeom prst="rect">
-            <a:avLst/>
-          </a:prstGeom>
-          <a:noFill/>
-        </p:spPr>
-        <p:txBody>
-          <a:bodyPr wrap="none" rtlCol="0">
-            <a:spAutoFit/>
-          </a:bodyPr>
-          <a:lstStyle/>
-          <a:p>
-            <a:r>
-              <a:rPr kumimoji="1" lang="en-US" altLang="zh-CN" dirty="0"/>
-              <a:t>Code comprehension</a:t>
-            </a:r>
-            <a:endParaRPr kumimoji="1" lang="zh-CN" altLang="en-US" dirty="0"/>
-          </a:p>
-        </p:txBody>
-      </p:sp>
-      <p:sp>
-        <p:nvSpPr>
-          <p:cNvPr id="20" name="右箭头 19">
-            <a:extLst>
-              <a:ext uri="{FF2B5EF4-FFF2-40B4-BE49-F238E27FC236}">
-                <a16:creationId xmlns:a16="http://schemas.microsoft.com/office/drawing/2014/main" id="{A9330039-05F1-52F8-3CB4-DF93D6FA6900}"/>
-              </a:ext>
-            </a:extLst>
-          </p:cNvPr>
-          <p:cNvSpPr/>
-          <p:nvPr/>
-        </p:nvSpPr>
-        <p:spPr>
-          <a:xfrm>
-            <a:off x="6759627" y="1366090"/>
-            <a:ext cx="1280160" cy="381430"/>
-          </a:xfrm>
-          <a:prstGeom prst="rightArrow">
-            <a:avLst/>
-          </a:prstGeom>
-        </p:spPr>
-        <p:style>
-          <a:lnRef idx="2">
-            <a:schemeClr val="accent1">
-              <a:shade val="15000"/>
-            </a:schemeClr>
-          </a:lnRef>
-          <a:fillRef idx="1">
-            <a:schemeClr val="accent1"/>
-          </a:fillRef>
-          <a:effectRef idx="0">
-            <a:schemeClr val="accent1"/>
-          </a:effectRef>
-          <a:fontRef idx="minor">
-            <a:schemeClr val="lt1"/>
-          </a:fontRef>
-        </p:style>
-        <p:txBody>
-          <a:bodyPr rtlCol="0" anchor="ctr"/>
-          <a:lstStyle/>
-          <a:p>
-            <a:pPr algn="ctr"/>
-            <a:endParaRPr kumimoji="1" lang="zh-CN" altLang="en-US"/>
-          </a:p>
-        </p:txBody>
-      </p:sp>
-      <p:sp>
-        <p:nvSpPr>
-          <p:cNvPr id="21" name="右箭头 20">
-            <a:extLst>
-              <a:ext uri="{FF2B5EF4-FFF2-40B4-BE49-F238E27FC236}">
-                <a16:creationId xmlns:a16="http://schemas.microsoft.com/office/drawing/2014/main" id="{F169FB9B-ED97-EB2B-A2D0-04F8924CDE20}"/>
-              </a:ext>
-            </a:extLst>
-          </p:cNvPr>
-          <p:cNvSpPr/>
-          <p:nvPr/>
-        </p:nvSpPr>
-        <p:spPr>
-          <a:xfrm rot="10800000">
-            <a:off x="6759627" y="2163466"/>
-            <a:ext cx="1280160" cy="381430"/>
-          </a:xfrm>
-          <a:prstGeom prst="rightArrow">
-            <a:avLst/>
-          </a:prstGeom>
-        </p:spPr>
-        <p:style>
-          <a:lnRef idx="2">
-            <a:schemeClr val="accent1">
-              <a:shade val="15000"/>
-            </a:schemeClr>
-          </a:lnRef>
-          <a:fillRef idx="1">
-            <a:schemeClr val="accent1"/>
-          </a:fillRef>
-          <a:effectRef idx="0">
-            <a:schemeClr val="accent1"/>
-          </a:effectRef>
-          <a:fontRef idx="minor">
-            <a:schemeClr val="lt1"/>
-          </a:fontRef>
-        </p:style>
-        <p:txBody>
-          <a:bodyPr rtlCol="0" anchor="ctr"/>
-          <a:lstStyle/>
-          <a:p>
-            <a:pPr algn="ctr"/>
-            <a:endParaRPr kumimoji="1" lang="zh-CN" altLang="en-US"/>
-          </a:p>
-        </p:txBody>
-      </p:sp>
-      <p:sp>
-        <p:nvSpPr>
-          <p:cNvPr id="23" name="文本框 22">
-            <a:extLst>
-              <a:ext uri="{FF2B5EF4-FFF2-40B4-BE49-F238E27FC236}">
-                <a16:creationId xmlns:a16="http://schemas.microsoft.com/office/drawing/2014/main" id="{172EA616-AD89-B643-4107-43EF8FFB7610}"/>
-              </a:ext>
-            </a:extLst>
-          </p:cNvPr>
-          <p:cNvSpPr txBox="1"/>
-          <p:nvPr/>
-        </p:nvSpPr>
-        <p:spPr>
-          <a:xfrm>
-            <a:off x="6895402" y="950144"/>
-            <a:ext cx="1008609" cy="369332"/>
-          </a:xfrm>
-          <a:prstGeom prst="rect">
-            <a:avLst/>
-          </a:prstGeom>
-          <a:noFill/>
-        </p:spPr>
-        <p:txBody>
-          <a:bodyPr wrap="none" rtlCol="0">
-            <a:spAutoFit/>
-          </a:bodyPr>
-          <a:lstStyle/>
-          <a:p>
-            <a:r>
-              <a:rPr kumimoji="1" lang="en-US" altLang="zh-CN" dirty="0"/>
-              <a:t>Compile</a:t>
-            </a:r>
-            <a:endParaRPr kumimoji="1" lang="zh-CN" altLang="en-US" dirty="0"/>
-          </a:p>
-        </p:txBody>
-      </p:sp>
-      <p:sp>
-        <p:nvSpPr>
-          <p:cNvPr id="24" name="文本框 23">
-            <a:extLst>
-              <a:ext uri="{FF2B5EF4-FFF2-40B4-BE49-F238E27FC236}">
-                <a16:creationId xmlns:a16="http://schemas.microsoft.com/office/drawing/2014/main" id="{55E49751-E619-682D-7062-2639F4A37E09}"/>
-              </a:ext>
-            </a:extLst>
-          </p:cNvPr>
-          <p:cNvSpPr txBox="1"/>
-          <p:nvPr/>
-        </p:nvSpPr>
-        <p:spPr>
-          <a:xfrm>
-            <a:off x="6895402" y="2591510"/>
-            <a:ext cx="1247457" cy="369332"/>
-          </a:xfrm>
-          <a:prstGeom prst="rect">
-            <a:avLst/>
-          </a:prstGeom>
-          <a:noFill/>
-        </p:spPr>
-        <p:txBody>
-          <a:bodyPr wrap="none" rtlCol="0">
-            <a:spAutoFit/>
-          </a:bodyPr>
-          <a:lstStyle/>
-          <a:p>
-            <a:r>
-              <a:rPr kumimoji="1" lang="en-US" altLang="zh-CN" dirty="0"/>
-              <a:t>Decompile</a:t>
-            </a:r>
-            <a:endParaRPr kumimoji="1" lang="zh-CN" altLang="en-US" dirty="0"/>
-          </a:p>
-        </p:txBody>
-      </p:sp>
-      <p:sp>
-        <p:nvSpPr>
-          <p:cNvPr id="26" name="左大括号 25">
-            <a:extLst>
-              <a:ext uri="{FF2B5EF4-FFF2-40B4-BE49-F238E27FC236}">
-                <a16:creationId xmlns:a16="http://schemas.microsoft.com/office/drawing/2014/main" id="{EEED2EDB-AA8C-8A92-326E-38A7EDFD5E52}"/>
-              </a:ext>
-            </a:extLst>
-          </p:cNvPr>
-          <p:cNvSpPr/>
-          <p:nvPr/>
-        </p:nvSpPr>
-        <p:spPr>
-          <a:xfrm>
-            <a:off x="3975735" y="3223965"/>
-            <a:ext cx="410488" cy="2659310"/>
-          </a:xfrm>
-          <a:prstGeom prst="leftBrace">
-            <a:avLst/>
-          </a:prstGeom>
-        </p:spPr>
-        <p:style>
-          <a:lnRef idx="2">
-            <a:schemeClr val="accent1"/>
-          </a:lnRef>
-          <a:fillRef idx="0">
-            <a:schemeClr val="accent1"/>
-          </a:fillRef>
-          <a:effectRef idx="1">
-            <a:schemeClr val="accent1"/>
-          </a:effectRef>
-          <a:fontRef idx="minor">
-            <a:schemeClr val="tx1"/>
-          </a:fontRef>
-        </p:style>
-        <p:txBody>
-          <a:bodyPr rtlCol="0" anchor="ctr"/>
-          <a:lstStyle/>
-          <a:p>
-            <a:pPr algn="ctr"/>
-            <a:endParaRPr kumimoji="1" lang="zh-CN" altLang="en-US"/>
-          </a:p>
-        </p:txBody>
-      </p:sp>
-      <p:sp>
-        <p:nvSpPr>
-          <p:cNvPr id="27" name="文本框 26">
-            <a:extLst>
-              <a:ext uri="{FF2B5EF4-FFF2-40B4-BE49-F238E27FC236}">
-                <a16:creationId xmlns:a16="http://schemas.microsoft.com/office/drawing/2014/main" id="{1E4AE626-87EC-1ACA-CE3E-B1FB66C236B7}"/>
-              </a:ext>
-            </a:extLst>
-          </p:cNvPr>
-          <p:cNvSpPr txBox="1"/>
-          <p:nvPr/>
-        </p:nvSpPr>
-        <p:spPr>
-          <a:xfrm>
-            <a:off x="4386223" y="3223965"/>
-            <a:ext cx="864339" cy="369332"/>
-          </a:xfrm>
-          <a:prstGeom prst="rect">
-            <a:avLst/>
-          </a:prstGeom>
-          <a:noFill/>
-        </p:spPr>
-        <p:txBody>
-          <a:bodyPr wrap="none" rtlCol="0">
-            <a:spAutoFit/>
-          </a:bodyPr>
-          <a:lstStyle/>
-          <a:p>
-            <a:r>
-              <a:rPr kumimoji="1" lang="en-US" altLang="zh-CN" dirty="0"/>
-              <a:t>C/C++</a:t>
-            </a:r>
-            <a:endParaRPr kumimoji="1" lang="zh-CN" altLang="en-US" dirty="0"/>
-          </a:p>
-        </p:txBody>
-      </p:sp>
-      <p:sp>
-        <p:nvSpPr>
-          <p:cNvPr id="28" name="文本框 27">
-            <a:extLst>
-              <a:ext uri="{FF2B5EF4-FFF2-40B4-BE49-F238E27FC236}">
-                <a16:creationId xmlns:a16="http://schemas.microsoft.com/office/drawing/2014/main" id="{187E81E6-E79B-2146-065C-A4823F883BC6}"/>
-              </a:ext>
-            </a:extLst>
-          </p:cNvPr>
-          <p:cNvSpPr txBox="1"/>
-          <p:nvPr/>
-        </p:nvSpPr>
-        <p:spPr>
-          <a:xfrm>
-            <a:off x="4386223" y="3769613"/>
-            <a:ext cx="1382110" cy="369332"/>
-          </a:xfrm>
-          <a:prstGeom prst="rect">
-            <a:avLst/>
-          </a:prstGeom>
-          <a:noFill/>
-        </p:spPr>
-        <p:txBody>
-          <a:bodyPr wrap="none" rtlCol="0">
-            <a:spAutoFit/>
-          </a:bodyPr>
-          <a:lstStyle/>
-          <a:p>
-            <a:r>
-              <a:rPr kumimoji="1" lang="en-US" altLang="zh-CN" dirty="0"/>
-              <a:t>Java/Python</a:t>
-            </a:r>
-            <a:endParaRPr kumimoji="1" lang="zh-CN" altLang="en-US" dirty="0"/>
-          </a:p>
-        </p:txBody>
-      </p:sp>
-      <p:sp>
-        <p:nvSpPr>
-          <p:cNvPr id="29" name="文本框 28">
-            <a:extLst>
-              <a:ext uri="{FF2B5EF4-FFF2-40B4-BE49-F238E27FC236}">
-                <a16:creationId xmlns:a16="http://schemas.microsoft.com/office/drawing/2014/main" id="{1ABBD0AC-8508-2C35-A877-74B4782AB5A5}"/>
-              </a:ext>
-            </a:extLst>
-          </p:cNvPr>
-          <p:cNvSpPr txBox="1"/>
-          <p:nvPr/>
-        </p:nvSpPr>
-        <p:spPr>
-          <a:xfrm>
-            <a:off x="4386223" y="4374420"/>
-            <a:ext cx="787395" cy="369332"/>
-          </a:xfrm>
-          <a:prstGeom prst="rect">
-            <a:avLst/>
-          </a:prstGeom>
-          <a:noFill/>
-        </p:spPr>
-        <p:txBody>
-          <a:bodyPr wrap="none" rtlCol="0">
-            <a:spAutoFit/>
-          </a:bodyPr>
-          <a:lstStyle/>
-          <a:p>
-            <a:r>
-              <a:rPr kumimoji="1" lang="en-US" altLang="zh-CN" dirty="0"/>
-              <a:t>CUDA</a:t>
-            </a:r>
-            <a:endParaRPr kumimoji="1" lang="zh-CN" altLang="en-US" dirty="0"/>
-          </a:p>
-        </p:txBody>
-      </p:sp>
-      <p:sp>
-        <p:nvSpPr>
-          <p:cNvPr id="30" name="文本框 29">
-            <a:extLst>
-              <a:ext uri="{FF2B5EF4-FFF2-40B4-BE49-F238E27FC236}">
-                <a16:creationId xmlns:a16="http://schemas.microsoft.com/office/drawing/2014/main" id="{FE8093B8-C380-883B-82C3-9FF4D6126F9F}"/>
-              </a:ext>
-            </a:extLst>
-          </p:cNvPr>
-          <p:cNvSpPr txBox="1"/>
-          <p:nvPr/>
-        </p:nvSpPr>
-        <p:spPr>
-          <a:xfrm>
-            <a:off x="4395840" y="4979227"/>
-            <a:ext cx="768159" cy="369332"/>
-          </a:xfrm>
-          <a:prstGeom prst="rect">
-            <a:avLst/>
-          </a:prstGeom>
-          <a:noFill/>
-        </p:spPr>
-        <p:txBody>
-          <a:bodyPr wrap="none" rtlCol="0">
-            <a:spAutoFit/>
-          </a:bodyPr>
-          <a:lstStyle/>
-          <a:p>
-            <a:r>
-              <a:rPr kumimoji="1" lang="en-US" altLang="zh-CN" dirty="0"/>
-              <a:t>Triton</a:t>
-            </a:r>
-            <a:endParaRPr kumimoji="1" lang="zh-CN" altLang="en-US" dirty="0"/>
-          </a:p>
-        </p:txBody>
-      </p:sp>
-      <p:sp>
-        <p:nvSpPr>
-          <p:cNvPr id="32" name="文本框 31">
-            <a:extLst>
-              <a:ext uri="{FF2B5EF4-FFF2-40B4-BE49-F238E27FC236}">
-                <a16:creationId xmlns:a16="http://schemas.microsoft.com/office/drawing/2014/main" id="{396F0E71-92BC-146B-7F13-9048911DFEBB}"/>
-              </a:ext>
-            </a:extLst>
-          </p:cNvPr>
-          <p:cNvSpPr txBox="1"/>
-          <p:nvPr/>
-        </p:nvSpPr>
-        <p:spPr>
-          <a:xfrm>
-            <a:off x="4438126" y="5513943"/>
-            <a:ext cx="692818" cy="369332"/>
-          </a:xfrm>
-          <a:prstGeom prst="rect">
-            <a:avLst/>
-          </a:prstGeom>
-          <a:noFill/>
-        </p:spPr>
-        <p:txBody>
-          <a:bodyPr wrap="none" rtlCol="0">
-            <a:spAutoFit/>
-          </a:bodyPr>
-          <a:lstStyle/>
-          <a:p>
-            <a:r>
-              <a:rPr kumimoji="1" lang="en-US" altLang="zh-CN" dirty="0" err="1"/>
-              <a:t>CuTe</a:t>
-            </a:r>
-            <a:endParaRPr kumimoji="1" lang="zh-CN" altLang="en-US" dirty="0"/>
-          </a:p>
-        </p:txBody>
-      </p:sp>
-      <p:sp>
-        <p:nvSpPr>
-          <p:cNvPr id="33" name="左弧形箭头 32">
-            <a:extLst>
-              <a:ext uri="{FF2B5EF4-FFF2-40B4-BE49-F238E27FC236}">
-                <a16:creationId xmlns:a16="http://schemas.microsoft.com/office/drawing/2014/main" id="{9C6FA51D-6761-08B0-C22D-007560C25531}"/>
-              </a:ext>
-            </a:extLst>
-          </p:cNvPr>
-          <p:cNvSpPr/>
-          <p:nvPr/>
-        </p:nvSpPr>
-        <p:spPr>
-          <a:xfrm>
-            <a:off x="5777950" y="3769613"/>
-            <a:ext cx="573438" cy="1350301"/>
-          </a:xfrm>
-          <a:prstGeom prst="curvedLeftArrow">
-            <a:avLst/>
-          </a:prstGeom>
-        </p:spPr>
-        <p:style>
-          <a:lnRef idx="2">
-            <a:schemeClr val="accent1">
-              <a:shade val="15000"/>
-            </a:schemeClr>
-          </a:lnRef>
-          <a:fillRef idx="1">
-            <a:schemeClr val="accent1"/>
-          </a:fillRef>
-          <a:effectRef idx="0">
-            <a:schemeClr val="accent1"/>
-          </a:effectRef>
-          <a:fontRef idx="minor">
-            <a:schemeClr val="lt1"/>
-          </a:fontRef>
-        </p:style>
-        <p:txBody>
-          <a:bodyPr rtlCol="0" anchor="ctr"/>
-          <a:lstStyle/>
-          <a:p>
-            <a:pPr algn="ctr"/>
-            <a:endParaRPr kumimoji="1" lang="zh-CN" altLang="en-US">
-              <a:solidFill>
-                <a:schemeClr val="tx1"/>
-              </a:solidFill>
-            </a:endParaRPr>
-          </a:p>
-        </p:txBody>
-      </p:sp>
-      <p:sp>
-        <p:nvSpPr>
-          <p:cNvPr id="34" name="文本框 33">
-            <a:extLst>
-              <a:ext uri="{FF2B5EF4-FFF2-40B4-BE49-F238E27FC236}">
-                <a16:creationId xmlns:a16="http://schemas.microsoft.com/office/drawing/2014/main" id="{6330FCDE-A380-6F1D-7520-9E5BB502D5B2}"/>
-              </a:ext>
-            </a:extLst>
-          </p:cNvPr>
-          <p:cNvSpPr txBox="1"/>
-          <p:nvPr/>
-        </p:nvSpPr>
-        <p:spPr>
-          <a:xfrm>
-            <a:off x="6383914" y="4075431"/>
-            <a:ext cx="1455848" cy="369332"/>
-          </a:xfrm>
-          <a:prstGeom prst="rect">
-            <a:avLst/>
-          </a:prstGeom>
-          <a:noFill/>
-        </p:spPr>
-        <p:txBody>
-          <a:bodyPr wrap="none" rtlCol="0">
-            <a:spAutoFit/>
-          </a:bodyPr>
-          <a:lstStyle/>
-          <a:p>
-            <a:r>
-              <a:rPr kumimoji="1" lang="en-US" altLang="zh-CN" dirty="0" err="1"/>
-              <a:t>Transpilation</a:t>
-            </a:r>
-            <a:endParaRPr kumimoji="1" lang="zh-CN" altLang="en-US" dirty="0"/>
-          </a:p>
-        </p:txBody>
-      </p:sp>
-      <p:sp>
-        <p:nvSpPr>
-          <p:cNvPr id="35" name="文本框 34">
-            <a:extLst>
-              <a:ext uri="{FF2B5EF4-FFF2-40B4-BE49-F238E27FC236}">
-                <a16:creationId xmlns:a16="http://schemas.microsoft.com/office/drawing/2014/main" id="{04037325-2CF4-579A-86C9-0D74CDA95566}"/>
-              </a:ext>
-            </a:extLst>
-          </p:cNvPr>
-          <p:cNvSpPr txBox="1"/>
-          <p:nvPr/>
-        </p:nvSpPr>
-        <p:spPr>
-          <a:xfrm>
-            <a:off x="6401121" y="4444763"/>
-            <a:ext cx="1649811" cy="369332"/>
-          </a:xfrm>
-          <a:prstGeom prst="rect">
-            <a:avLst/>
-          </a:prstGeom>
-          <a:noFill/>
-        </p:spPr>
-        <p:txBody>
-          <a:bodyPr wrap="none" rtlCol="0">
-            <a:spAutoFit/>
-          </a:bodyPr>
-          <a:lstStyle/>
-          <a:p>
-            <a:r>
-              <a:rPr kumimoji="1" lang="en-US" altLang="zh-CN" dirty="0" err="1"/>
-              <a:t>AutoParallelize</a:t>
-            </a:r>
-            <a:endParaRPr kumimoji="1" lang="en-US" altLang="zh-CN" dirty="0"/>
-          </a:p>
-        </p:txBody>
-      </p:sp>
-      <p:sp>
-        <p:nvSpPr>
-          <p:cNvPr id="38" name="文本框 37">
-            <a:extLst>
-              <a:ext uri="{FF2B5EF4-FFF2-40B4-BE49-F238E27FC236}">
-                <a16:creationId xmlns:a16="http://schemas.microsoft.com/office/drawing/2014/main" id="{52699486-3E7D-0FB8-1FD9-F477EE5458B7}"/>
-              </a:ext>
-            </a:extLst>
-          </p:cNvPr>
-          <p:cNvSpPr txBox="1"/>
-          <p:nvPr/>
-        </p:nvSpPr>
-        <p:spPr>
-          <a:xfrm>
-            <a:off x="6361005" y="4860709"/>
-            <a:ext cx="2210862" cy="369332"/>
-          </a:xfrm>
-          <a:prstGeom prst="rect">
-            <a:avLst/>
-          </a:prstGeom>
-          <a:noFill/>
-        </p:spPr>
-        <p:txBody>
-          <a:bodyPr wrap="none" rtlCol="0">
-            <a:spAutoFit/>
-          </a:bodyPr>
-          <a:lstStyle/>
-          <a:p>
-            <a:r>
-              <a:rPr kumimoji="1" lang="en-US" altLang="zh-CN" dirty="0"/>
-              <a:t>Source Optimization</a:t>
-            </a:r>
-            <a:endParaRPr kumimoji="1" lang="zh-CN" altLang="en-US" dirty="0"/>
-          </a:p>
-        </p:txBody>
-      </p:sp>
-      <p:sp>
-        <p:nvSpPr>
-          <p:cNvPr id="40" name="左大括号 39">
-            <a:extLst>
-              <a:ext uri="{FF2B5EF4-FFF2-40B4-BE49-F238E27FC236}">
-                <a16:creationId xmlns:a16="http://schemas.microsoft.com/office/drawing/2014/main" id="{A9CF007B-72DB-3382-76AA-22886CBEC48F}"/>
-              </a:ext>
-            </a:extLst>
-          </p:cNvPr>
-          <p:cNvSpPr/>
-          <p:nvPr/>
-        </p:nvSpPr>
-        <p:spPr>
-          <a:xfrm>
-            <a:off x="8496095" y="3223965"/>
-            <a:ext cx="410488" cy="2659310"/>
-          </a:xfrm>
-          <a:prstGeom prst="leftBrace">
-            <a:avLst/>
-          </a:prstGeom>
-        </p:spPr>
-        <p:style>
-          <a:lnRef idx="2">
-            <a:schemeClr val="accent1"/>
-          </a:lnRef>
-          <a:fillRef idx="0">
-            <a:schemeClr val="accent1"/>
-          </a:fillRef>
-          <a:effectRef idx="1">
-            <a:schemeClr val="accent1"/>
-          </a:effectRef>
-          <a:fontRef idx="minor">
-            <a:schemeClr val="tx1"/>
-          </a:fontRef>
-        </p:style>
-        <p:txBody>
-          <a:bodyPr rtlCol="0" anchor="ctr"/>
-          <a:lstStyle/>
-          <a:p>
-            <a:pPr algn="ctr"/>
-            <a:endParaRPr kumimoji="1" lang="zh-CN" altLang="en-US"/>
-          </a:p>
-        </p:txBody>
-      </p:sp>
-      <p:sp>
-        <p:nvSpPr>
-          <p:cNvPr id="41" name="文本框 40">
-            <a:extLst>
-              <a:ext uri="{FF2B5EF4-FFF2-40B4-BE49-F238E27FC236}">
-                <a16:creationId xmlns:a16="http://schemas.microsoft.com/office/drawing/2014/main" id="{1EDC42D5-F61F-F676-CBE6-A9F4A51D55CD}"/>
-              </a:ext>
-            </a:extLst>
-          </p:cNvPr>
-          <p:cNvSpPr txBox="1"/>
-          <p:nvPr/>
-        </p:nvSpPr>
-        <p:spPr>
-          <a:xfrm>
-            <a:off x="8886946" y="3128012"/>
-            <a:ext cx="994183" cy="369332"/>
-          </a:xfrm>
-          <a:prstGeom prst="rect">
-            <a:avLst/>
-          </a:prstGeom>
-          <a:noFill/>
-        </p:spPr>
-        <p:txBody>
-          <a:bodyPr wrap="none" rtlCol="0">
-            <a:spAutoFit/>
-          </a:bodyPr>
-          <a:lstStyle/>
-          <a:p>
-            <a:r>
-              <a:rPr kumimoji="1" lang="en-US" altLang="zh-CN" dirty="0"/>
-              <a:t>LLVM IR</a:t>
-            </a:r>
-            <a:endParaRPr kumimoji="1" lang="zh-CN" altLang="en-US" dirty="0"/>
-          </a:p>
-        </p:txBody>
-      </p:sp>
-      <p:sp>
-        <p:nvSpPr>
-          <p:cNvPr id="42" name="文本框 41">
-            <a:extLst>
-              <a:ext uri="{FF2B5EF4-FFF2-40B4-BE49-F238E27FC236}">
-                <a16:creationId xmlns:a16="http://schemas.microsoft.com/office/drawing/2014/main" id="{8F8F1CA0-298F-4331-D5E1-2762DE91B6D4}"/>
-              </a:ext>
-            </a:extLst>
-          </p:cNvPr>
-          <p:cNvSpPr txBox="1"/>
-          <p:nvPr/>
-        </p:nvSpPr>
-        <p:spPr>
-          <a:xfrm>
-            <a:off x="8886946" y="3663628"/>
-            <a:ext cx="529312" cy="369332"/>
-          </a:xfrm>
-          <a:prstGeom prst="rect">
-            <a:avLst/>
-          </a:prstGeom>
-          <a:noFill/>
-        </p:spPr>
-        <p:txBody>
-          <a:bodyPr wrap="none" rtlCol="0">
-            <a:spAutoFit/>
-          </a:bodyPr>
-          <a:lstStyle/>
-          <a:p>
-            <a:r>
-              <a:rPr kumimoji="1" lang="en-US" altLang="zh-CN" dirty="0"/>
-              <a:t>x86</a:t>
-            </a:r>
-            <a:endParaRPr kumimoji="1" lang="zh-CN" altLang="en-US" dirty="0"/>
-          </a:p>
-        </p:txBody>
-      </p:sp>
-      <p:sp>
-        <p:nvSpPr>
-          <p:cNvPr id="43" name="文本框 42">
-            <a:extLst>
-              <a:ext uri="{FF2B5EF4-FFF2-40B4-BE49-F238E27FC236}">
-                <a16:creationId xmlns:a16="http://schemas.microsoft.com/office/drawing/2014/main" id="{088C6281-5CE0-7E14-8E21-766B831DA2CA}"/>
-              </a:ext>
-            </a:extLst>
-          </p:cNvPr>
-          <p:cNvSpPr txBox="1"/>
-          <p:nvPr/>
-        </p:nvSpPr>
-        <p:spPr>
-          <a:xfrm>
-            <a:off x="8906583" y="4990411"/>
-            <a:ext cx="492443" cy="369332"/>
-          </a:xfrm>
-          <a:prstGeom prst="rect">
-            <a:avLst/>
-          </a:prstGeom>
-          <a:noFill/>
-        </p:spPr>
-        <p:txBody>
-          <a:bodyPr wrap="none" rtlCol="0">
-            <a:spAutoFit/>
-          </a:bodyPr>
-          <a:lstStyle/>
-          <a:p>
-            <a:r>
-              <a:rPr kumimoji="1" lang="en-US" altLang="zh-CN" dirty="0" err="1"/>
-              <a:t>ptx</a:t>
-            </a:r>
-            <a:endParaRPr kumimoji="1" lang="zh-CN" altLang="en-US" dirty="0"/>
-          </a:p>
-        </p:txBody>
-      </p:sp>
-      <p:sp>
-        <p:nvSpPr>
-          <p:cNvPr id="44" name="文本框 43">
-            <a:extLst>
-              <a:ext uri="{FF2B5EF4-FFF2-40B4-BE49-F238E27FC236}">
-                <a16:creationId xmlns:a16="http://schemas.microsoft.com/office/drawing/2014/main" id="{9592C534-CBE0-2B5A-4A45-4C9CCEA4C13A}"/>
-              </a:ext>
-            </a:extLst>
-          </p:cNvPr>
-          <p:cNvSpPr txBox="1"/>
-          <p:nvPr/>
-        </p:nvSpPr>
-        <p:spPr>
-          <a:xfrm>
-            <a:off x="8860888" y="4374420"/>
-            <a:ext cx="1095172" cy="369332"/>
-          </a:xfrm>
-          <a:prstGeom prst="rect">
-            <a:avLst/>
-          </a:prstGeom>
-          <a:noFill/>
-        </p:spPr>
-        <p:txBody>
-          <a:bodyPr wrap="none" rtlCol="0">
-            <a:spAutoFit/>
-          </a:bodyPr>
-          <a:lstStyle/>
-          <a:p>
-            <a:r>
-              <a:rPr kumimoji="1" lang="en-US" altLang="zh-CN" dirty="0"/>
-              <a:t>arm/</a:t>
-            </a:r>
-            <a:r>
-              <a:rPr kumimoji="1" lang="en-US" altLang="zh-CN" dirty="0" err="1"/>
-              <a:t>riscv</a:t>
-            </a:r>
-            <a:endParaRPr kumimoji="1" lang="zh-CN" altLang="en-US" dirty="0"/>
-          </a:p>
-        </p:txBody>
-      </p:sp>
-      <p:sp>
-        <p:nvSpPr>
-          <p:cNvPr id="47" name="左弧形箭头 46">
-            <a:extLst>
-              <a:ext uri="{FF2B5EF4-FFF2-40B4-BE49-F238E27FC236}">
-                <a16:creationId xmlns:a16="http://schemas.microsoft.com/office/drawing/2014/main" id="{3451B993-EA95-B518-8049-0A8169B0F6CB}"/>
-              </a:ext>
-            </a:extLst>
-          </p:cNvPr>
-          <p:cNvSpPr/>
-          <p:nvPr/>
-        </p:nvSpPr>
-        <p:spPr>
-          <a:xfrm>
-            <a:off x="9716539" y="3878469"/>
-            <a:ext cx="573438" cy="1350301"/>
-          </a:xfrm>
-          <a:prstGeom prst="curvedLeftArrow">
-            <a:avLst/>
-          </a:prstGeom>
-        </p:spPr>
-        <p:style>
-          <a:lnRef idx="2">
-            <a:schemeClr val="accent1">
-              <a:shade val="15000"/>
-            </a:schemeClr>
-          </a:lnRef>
-          <a:fillRef idx="1">
-            <a:schemeClr val="accent1"/>
-          </a:fillRef>
-          <a:effectRef idx="0">
-            <a:schemeClr val="accent1"/>
-          </a:effectRef>
-          <a:fontRef idx="minor">
-            <a:schemeClr val="lt1"/>
-          </a:fontRef>
-        </p:style>
-        <p:txBody>
-          <a:bodyPr rtlCol="0" anchor="ctr"/>
-          <a:lstStyle/>
-          <a:p>
-            <a:pPr algn="ctr"/>
-            <a:endParaRPr kumimoji="1" lang="zh-CN" altLang="en-US">
-              <a:solidFill>
-                <a:schemeClr val="tx1"/>
-              </a:solidFill>
-            </a:endParaRPr>
-          </a:p>
-        </p:txBody>
-      </p:sp>
-      <p:sp>
-        <p:nvSpPr>
-          <p:cNvPr id="48" name="文本框 47">
-            <a:extLst>
-              <a:ext uri="{FF2B5EF4-FFF2-40B4-BE49-F238E27FC236}">
-                <a16:creationId xmlns:a16="http://schemas.microsoft.com/office/drawing/2014/main" id="{948A3CB4-8673-0923-6AA8-64680E62E7DC}"/>
-              </a:ext>
-            </a:extLst>
-          </p:cNvPr>
-          <p:cNvSpPr txBox="1"/>
-          <p:nvPr/>
-        </p:nvSpPr>
-        <p:spPr>
-          <a:xfrm>
-            <a:off x="10210559" y="3751012"/>
-            <a:ext cx="1941557" cy="369332"/>
-          </a:xfrm>
-          <a:prstGeom prst="rect">
-            <a:avLst/>
-          </a:prstGeom>
-          <a:noFill/>
-        </p:spPr>
-        <p:txBody>
-          <a:bodyPr wrap="none" rtlCol="0">
-            <a:spAutoFit/>
-          </a:bodyPr>
-          <a:lstStyle/>
-          <a:p>
-            <a:r>
-              <a:rPr kumimoji="1" lang="en-US" altLang="zh-CN" dirty="0"/>
-              <a:t>Binary Translation</a:t>
-            </a:r>
-            <a:endParaRPr kumimoji="1" lang="zh-CN" altLang="en-US" dirty="0"/>
-          </a:p>
-        </p:txBody>
-      </p:sp>
-      <p:sp>
-        <p:nvSpPr>
-          <p:cNvPr id="49" name="文本框 48">
-            <a:extLst>
-              <a:ext uri="{FF2B5EF4-FFF2-40B4-BE49-F238E27FC236}">
-                <a16:creationId xmlns:a16="http://schemas.microsoft.com/office/drawing/2014/main" id="{16EF7C62-C8AA-BCC7-7CB7-E88795C2B424}"/>
-              </a:ext>
-            </a:extLst>
-          </p:cNvPr>
-          <p:cNvSpPr txBox="1"/>
-          <p:nvPr/>
-        </p:nvSpPr>
-        <p:spPr>
-          <a:xfrm>
-            <a:off x="10264522" y="4263955"/>
-            <a:ext cx="1721946" cy="369332"/>
-          </a:xfrm>
-          <a:prstGeom prst="rect">
-            <a:avLst/>
-          </a:prstGeom>
-          <a:noFill/>
-        </p:spPr>
-        <p:txBody>
-          <a:bodyPr wrap="none" rtlCol="0">
-            <a:spAutoFit/>
-          </a:bodyPr>
-          <a:lstStyle/>
-          <a:p>
-            <a:r>
-              <a:rPr kumimoji="1" lang="en-US" altLang="zh-CN" dirty="0"/>
-              <a:t>IR Optimization</a:t>
-            </a:r>
-          </a:p>
-        </p:txBody>
-      </p:sp>
-      <p:sp>
-        <p:nvSpPr>
-          <p:cNvPr id="52" name="文本框 51">
-            <a:extLst>
-              <a:ext uri="{FF2B5EF4-FFF2-40B4-BE49-F238E27FC236}">
-                <a16:creationId xmlns:a16="http://schemas.microsoft.com/office/drawing/2014/main" id="{B55B284B-8EA6-EC00-3072-EA12BB936845}"/>
-              </a:ext>
-            </a:extLst>
-          </p:cNvPr>
-          <p:cNvSpPr txBox="1"/>
-          <p:nvPr/>
-        </p:nvSpPr>
-        <p:spPr>
-          <a:xfrm>
-            <a:off x="10280786" y="4754440"/>
-            <a:ext cx="944489" cy="369332"/>
-          </a:xfrm>
-          <a:prstGeom prst="rect">
-            <a:avLst/>
-          </a:prstGeom>
-          <a:noFill/>
-        </p:spPr>
-        <p:txBody>
-          <a:bodyPr wrap="none" rtlCol="0">
-            <a:spAutoFit/>
-          </a:bodyPr>
-          <a:lstStyle/>
-          <a:p>
-            <a:r>
-              <a:rPr kumimoji="1" lang="en-US" altLang="zh-CN" dirty="0"/>
-              <a:t>Fuzzing</a:t>
-            </a:r>
-          </a:p>
-        </p:txBody>
-      </p:sp>
-      <p:sp>
-        <p:nvSpPr>
-          <p:cNvPr id="53" name="文本框 52">
-            <a:extLst>
-              <a:ext uri="{FF2B5EF4-FFF2-40B4-BE49-F238E27FC236}">
-                <a16:creationId xmlns:a16="http://schemas.microsoft.com/office/drawing/2014/main" id="{29676D1C-C55B-EEFF-6970-72E0805A2CC7}"/>
-              </a:ext>
-            </a:extLst>
-          </p:cNvPr>
-          <p:cNvSpPr txBox="1"/>
-          <p:nvPr/>
-        </p:nvSpPr>
-        <p:spPr>
-          <a:xfrm>
-            <a:off x="8906583" y="5471954"/>
-            <a:ext cx="611065" cy="369332"/>
-          </a:xfrm>
-          <a:prstGeom prst="rect">
-            <a:avLst/>
-          </a:prstGeom>
-          <a:noFill/>
-        </p:spPr>
-        <p:txBody>
-          <a:bodyPr wrap="none" rtlCol="0">
-            <a:spAutoFit/>
-          </a:bodyPr>
-          <a:lstStyle/>
-          <a:p>
-            <a:r>
-              <a:rPr kumimoji="1" lang="en-US" altLang="zh-CN" dirty="0"/>
-              <a:t>HDL</a:t>
-            </a:r>
-            <a:endParaRPr kumimoji="1" lang="zh-CN" altLang="en-US" dirty="0"/>
-          </a:p>
-        </p:txBody>
-      </p:sp>
+                <a:latin typeface="Times New Roman" panose="02020603050405020304" pitchFamily="18" charset="0"/>
+                <a:cs typeface="Times New Roman" panose="02020603050405020304" pitchFamily="18" charset="0"/>
+              </a:endParaRPr>
+            </a:p>
+          </p:txBody>
+        </p:sp>
+        <p:sp>
+          <p:nvSpPr>
+            <p:cNvPr id="48" name="文本框 47">
+              <a:extLst>
+                <a:ext uri="{FF2B5EF4-FFF2-40B4-BE49-F238E27FC236}">
+                  <a16:creationId xmlns:a16="http://schemas.microsoft.com/office/drawing/2014/main" id="{948A3CB4-8673-0923-6AA8-64680E62E7DC}"/>
+                </a:ext>
+              </a:extLst>
+            </p:cNvPr>
+            <p:cNvSpPr txBox="1"/>
+            <p:nvPr/>
+          </p:nvSpPr>
+          <p:spPr>
+            <a:xfrm>
+              <a:off x="10142765" y="3747967"/>
+              <a:ext cx="1910010" cy="369332"/>
+            </a:xfrm>
+            <a:prstGeom prst="rect">
+              <a:avLst/>
+            </a:prstGeom>
+            <a:noFill/>
+          </p:spPr>
+          <p:txBody>
+            <a:bodyPr wrap="none" rtlCol="0">
+              <a:spAutoFit/>
+            </a:bodyPr>
+            <a:lstStyle/>
+            <a:p>
+              <a:r>
+                <a:rPr kumimoji="1" lang="en-US" altLang="zh-CN" dirty="0">
+                  <a:latin typeface="Times New Roman" panose="02020603050405020304" pitchFamily="18" charset="0"/>
+                  <a:cs typeface="Times New Roman" panose="02020603050405020304" pitchFamily="18" charset="0"/>
+                </a:rPr>
+                <a:t>Binary Translation</a:t>
+              </a:r>
+              <a:endParaRPr kumimoji="1" lang="zh-CN" altLang="en-US" dirty="0">
+                <a:latin typeface="Times New Roman" panose="02020603050405020304" pitchFamily="18" charset="0"/>
+                <a:cs typeface="Times New Roman" panose="02020603050405020304" pitchFamily="18" charset="0"/>
+              </a:endParaRPr>
+            </a:p>
+          </p:txBody>
+        </p:sp>
+        <p:sp>
+          <p:nvSpPr>
+            <p:cNvPr id="49" name="文本框 48">
+              <a:extLst>
+                <a:ext uri="{FF2B5EF4-FFF2-40B4-BE49-F238E27FC236}">
+                  <a16:creationId xmlns:a16="http://schemas.microsoft.com/office/drawing/2014/main" id="{16EF7C62-C8AA-BCC7-7CB7-E88795C2B424}"/>
+                </a:ext>
+              </a:extLst>
+            </p:cNvPr>
+            <p:cNvSpPr txBox="1"/>
+            <p:nvPr/>
+          </p:nvSpPr>
+          <p:spPr>
+            <a:xfrm>
+              <a:off x="10169055" y="4736878"/>
+              <a:ext cx="1721946" cy="369332"/>
+            </a:xfrm>
+            <a:prstGeom prst="rect">
+              <a:avLst/>
+            </a:prstGeom>
+            <a:noFill/>
+          </p:spPr>
+          <p:txBody>
+            <a:bodyPr wrap="none" rtlCol="0">
+              <a:spAutoFit/>
+            </a:bodyPr>
+            <a:lstStyle/>
+            <a:p>
+              <a:r>
+                <a:rPr kumimoji="1" lang="en-US" altLang="zh-CN" dirty="0">
+                  <a:latin typeface="Times New Roman" panose="02020603050405020304" pitchFamily="18" charset="0"/>
+                  <a:cs typeface="Times New Roman" panose="02020603050405020304" pitchFamily="18" charset="0"/>
+                </a:rPr>
+                <a:t>IR Optimization</a:t>
+              </a:r>
+            </a:p>
+          </p:txBody>
+        </p:sp>
+        <p:sp>
+          <p:nvSpPr>
+            <p:cNvPr id="52" name="文本框 51">
+              <a:extLst>
+                <a:ext uri="{FF2B5EF4-FFF2-40B4-BE49-F238E27FC236}">
+                  <a16:creationId xmlns:a16="http://schemas.microsoft.com/office/drawing/2014/main" id="{B55B284B-8EA6-EC00-3072-EA12BB936845}"/>
+                </a:ext>
+              </a:extLst>
+            </p:cNvPr>
+            <p:cNvSpPr txBox="1"/>
+            <p:nvPr/>
+          </p:nvSpPr>
+          <p:spPr>
+            <a:xfrm>
+              <a:off x="10169055" y="5150189"/>
+              <a:ext cx="1858201" cy="369332"/>
+            </a:xfrm>
+            <a:prstGeom prst="rect">
+              <a:avLst/>
+            </a:prstGeom>
+            <a:noFill/>
+          </p:spPr>
+          <p:txBody>
+            <a:bodyPr wrap="none" rtlCol="0">
+              <a:spAutoFit/>
+            </a:bodyPr>
+            <a:lstStyle/>
+            <a:p>
+              <a:r>
+                <a:rPr kumimoji="1" lang="en-US" altLang="zh-CN" dirty="0">
+                  <a:latin typeface="Times New Roman" panose="02020603050405020304" pitchFamily="18" charset="0"/>
+                  <a:cs typeface="Times New Roman" panose="02020603050405020304" pitchFamily="18" charset="0"/>
+                </a:rPr>
+                <a:t>Compiler Fuzzing</a:t>
+              </a:r>
+            </a:p>
+          </p:txBody>
+        </p:sp>
+        <p:sp>
+          <p:nvSpPr>
+            <p:cNvPr id="53" name="文本框 52">
+              <a:extLst>
+                <a:ext uri="{FF2B5EF4-FFF2-40B4-BE49-F238E27FC236}">
+                  <a16:creationId xmlns:a16="http://schemas.microsoft.com/office/drawing/2014/main" id="{29676D1C-C55B-EEFF-6970-72E0805A2CC7}"/>
+                </a:ext>
+              </a:extLst>
+            </p:cNvPr>
+            <p:cNvSpPr txBox="1"/>
+            <p:nvPr/>
+          </p:nvSpPr>
+          <p:spPr>
+            <a:xfrm>
+              <a:off x="8828987" y="5459860"/>
+              <a:ext cx="659155" cy="369332"/>
+            </a:xfrm>
+            <a:prstGeom prst="rect">
+              <a:avLst/>
+            </a:prstGeom>
+            <a:noFill/>
+          </p:spPr>
+          <p:txBody>
+            <a:bodyPr wrap="none" rtlCol="0">
+              <a:spAutoFit/>
+            </a:bodyPr>
+            <a:lstStyle/>
+            <a:p>
+              <a:r>
+                <a:rPr kumimoji="1" lang="en-US" altLang="zh-CN" dirty="0">
+                  <a:latin typeface="Times New Roman" panose="02020603050405020304" pitchFamily="18" charset="0"/>
+                  <a:cs typeface="Times New Roman" panose="02020603050405020304" pitchFamily="18" charset="0"/>
+                </a:rPr>
+                <a:t>HDL</a:t>
+              </a:r>
+              <a:endParaRPr kumimoji="1" lang="zh-CN" altLang="en-US" dirty="0">
+                <a:latin typeface="Times New Roman" panose="02020603050405020304" pitchFamily="18" charset="0"/>
+                <a:cs typeface="Times New Roman" panose="02020603050405020304" pitchFamily="18" charset="0"/>
+              </a:endParaRPr>
+            </a:p>
+          </p:txBody>
+        </p:sp>
+        <p:sp>
+          <p:nvSpPr>
+            <p:cNvPr id="2" name="文本框 1">
+              <a:extLst>
+                <a:ext uri="{FF2B5EF4-FFF2-40B4-BE49-F238E27FC236}">
+                  <a16:creationId xmlns:a16="http://schemas.microsoft.com/office/drawing/2014/main" id="{722BFDFE-28FD-CFD8-87A1-C94C4AD50F7E}"/>
+                </a:ext>
+              </a:extLst>
+            </p:cNvPr>
+            <p:cNvSpPr txBox="1"/>
+            <p:nvPr/>
+          </p:nvSpPr>
+          <p:spPr>
+            <a:xfrm>
+              <a:off x="10163420" y="4259082"/>
+              <a:ext cx="1997663" cy="369332"/>
+            </a:xfrm>
+            <a:prstGeom prst="rect">
+              <a:avLst/>
+            </a:prstGeom>
+            <a:noFill/>
+          </p:spPr>
+          <p:txBody>
+            <a:bodyPr wrap="none" rtlCol="0">
+              <a:spAutoFit/>
+            </a:bodyPr>
+            <a:lstStyle/>
+            <a:p>
+              <a:r>
+                <a:rPr kumimoji="1" lang="en-US" altLang="zh-CN" dirty="0">
+                  <a:latin typeface="Times New Roman" panose="02020603050405020304" pitchFamily="18" charset="0"/>
+                  <a:cs typeface="Times New Roman" panose="02020603050405020304" pitchFamily="18" charset="0"/>
+                </a:rPr>
+                <a:t>ASM Optimization</a:t>
+              </a:r>
+            </a:p>
+          </p:txBody>
+        </p:sp>
+        <p:sp>
+          <p:nvSpPr>
+            <p:cNvPr id="5" name="文本框 4">
+              <a:extLst>
+                <a:ext uri="{FF2B5EF4-FFF2-40B4-BE49-F238E27FC236}">
+                  <a16:creationId xmlns:a16="http://schemas.microsoft.com/office/drawing/2014/main" id="{C0A438F5-12BC-D61E-7F2F-20056BC0B7FB}"/>
+                </a:ext>
+              </a:extLst>
+            </p:cNvPr>
+            <p:cNvSpPr txBox="1"/>
+            <p:nvPr/>
+          </p:nvSpPr>
+          <p:spPr>
+            <a:xfrm>
+              <a:off x="9440052" y="753384"/>
+              <a:ext cx="2589170" cy="369332"/>
+            </a:xfrm>
+            <a:prstGeom prst="rect">
+              <a:avLst/>
+            </a:prstGeom>
+            <a:noFill/>
+          </p:spPr>
+          <p:txBody>
+            <a:bodyPr wrap="none" rtlCol="0">
+              <a:spAutoFit/>
+            </a:bodyPr>
+            <a:lstStyle/>
+            <a:p>
+              <a:r>
+                <a:rPr kumimoji="1" lang="en-US" altLang="zh-CN" b="1" dirty="0">
+                  <a:latin typeface="Times New Roman" panose="02020603050405020304" pitchFamily="18" charset="0"/>
+                  <a:cs typeface="Times New Roman" panose="02020603050405020304" pitchFamily="18" charset="0"/>
+                </a:rPr>
+                <a:t>Scope of LLM Compiler</a:t>
+              </a:r>
+              <a:endParaRPr kumimoji="1" lang="zh-CN" altLang="en-US" b="1" dirty="0">
+                <a:latin typeface="Times New Roman" panose="02020603050405020304" pitchFamily="18" charset="0"/>
+                <a:cs typeface="Times New Roman" panose="02020603050405020304" pitchFamily="18" charset="0"/>
+              </a:endParaRPr>
+            </a:p>
+          </p:txBody>
+        </p:sp>
+        <p:sp>
+          <p:nvSpPr>
+            <p:cNvPr id="6" name="文本框 5">
+              <a:extLst>
+                <a:ext uri="{FF2B5EF4-FFF2-40B4-BE49-F238E27FC236}">
+                  <a16:creationId xmlns:a16="http://schemas.microsoft.com/office/drawing/2014/main" id="{102AD3D8-C17E-E182-6E6A-3F85B0370105}"/>
+                </a:ext>
+              </a:extLst>
+            </p:cNvPr>
+            <p:cNvSpPr txBox="1"/>
+            <p:nvPr/>
+          </p:nvSpPr>
+          <p:spPr>
+            <a:xfrm>
+              <a:off x="-112505" y="5638080"/>
+              <a:ext cx="1992853" cy="369332"/>
+            </a:xfrm>
+            <a:prstGeom prst="rect">
+              <a:avLst/>
+            </a:prstGeom>
+            <a:noFill/>
+          </p:spPr>
+          <p:txBody>
+            <a:bodyPr wrap="none" rtlCol="0">
+              <a:spAutoFit/>
+            </a:bodyPr>
+            <a:lstStyle/>
+            <a:p>
+              <a:r>
+                <a:rPr kumimoji="1" lang="en-US" altLang="zh-CN" b="1" dirty="0">
+                  <a:latin typeface="Times New Roman" panose="02020603050405020304" pitchFamily="18" charset="0"/>
+                  <a:cs typeface="Times New Roman" panose="02020603050405020304" pitchFamily="18" charset="0"/>
+                </a:rPr>
+                <a:t>Scope of LLM4SE</a:t>
+              </a:r>
+              <a:endParaRPr kumimoji="1" lang="zh-CN" altLang="en-US" b="1" dirty="0">
+                <a:latin typeface="Times New Roman" panose="02020603050405020304" pitchFamily="18" charset="0"/>
+                <a:cs typeface="Times New Roman" panose="02020603050405020304" pitchFamily="18" charset="0"/>
+              </a:endParaRPr>
+            </a:p>
+          </p:txBody>
+        </p:sp>
+        <p:sp>
+          <p:nvSpPr>
+            <p:cNvPr id="8" name="矩形 7">
+              <a:extLst>
+                <a:ext uri="{FF2B5EF4-FFF2-40B4-BE49-F238E27FC236}">
+                  <a16:creationId xmlns:a16="http://schemas.microsoft.com/office/drawing/2014/main" id="{FF2829C0-AE6F-1125-946E-0494490088AF}"/>
+                </a:ext>
+              </a:extLst>
+            </p:cNvPr>
+            <p:cNvSpPr/>
+            <p:nvPr/>
+          </p:nvSpPr>
+          <p:spPr>
+            <a:xfrm>
+              <a:off x="3810745" y="665938"/>
+              <a:ext cx="8303657" cy="5685166"/>
+            </a:xfrm>
+            <a:prstGeom prst="rect">
+              <a:avLst/>
+            </a:prstGeom>
+            <a:noFill/>
+          </p:spPr>
+          <p:style>
+            <a:lnRef idx="2">
+              <a:schemeClr val="accent1">
+                <a:shade val="15000"/>
+              </a:schemeClr>
+            </a:lnRef>
+            <a:fillRef idx="1">
+              <a:schemeClr val="accent1"/>
+            </a:fillRef>
+            <a:effectRef idx="0">
+              <a:schemeClr val="accent1"/>
+            </a:effectRef>
+            <a:fontRef idx="minor">
+              <a:schemeClr val="lt1"/>
+            </a:fontRef>
+          </p:style>
+          <p:txBody>
+            <a:bodyPr rtlCol="0" anchor="ctr"/>
+            <a:lstStyle/>
+            <a:p>
+              <a:pPr algn="ctr"/>
+              <a:endParaRPr kumimoji="1" lang="zh-CN" altLang="en-US">
+                <a:latin typeface="Times New Roman" panose="02020603050405020304" pitchFamily="18" charset="0"/>
+                <a:cs typeface="Times New Roman" panose="02020603050405020304" pitchFamily="18" charset="0"/>
+              </a:endParaRPr>
+            </a:p>
+          </p:txBody>
+        </p:sp>
+        <p:sp>
+          <p:nvSpPr>
+            <p:cNvPr id="9" name="文本框 8">
+              <a:extLst>
+                <a:ext uri="{FF2B5EF4-FFF2-40B4-BE49-F238E27FC236}">
+                  <a16:creationId xmlns:a16="http://schemas.microsoft.com/office/drawing/2014/main" id="{9B51F219-5C27-697B-41F3-10D188919645}"/>
+                </a:ext>
+              </a:extLst>
+            </p:cNvPr>
+            <p:cNvSpPr txBox="1"/>
+            <p:nvPr/>
+          </p:nvSpPr>
+          <p:spPr>
+            <a:xfrm>
+              <a:off x="5807254" y="4420108"/>
+              <a:ext cx="1295547" cy="369332"/>
+            </a:xfrm>
+            <a:prstGeom prst="rect">
+              <a:avLst/>
+            </a:prstGeom>
+            <a:noFill/>
+          </p:spPr>
+          <p:txBody>
+            <a:bodyPr wrap="none" rtlCol="0">
+              <a:spAutoFit/>
+            </a:bodyPr>
+            <a:lstStyle/>
+            <a:p>
+              <a:r>
+                <a:rPr kumimoji="1" lang="en-US" altLang="zh-CN" dirty="0" err="1">
+                  <a:latin typeface="Times New Roman" panose="02020603050405020304" pitchFamily="18" charset="0"/>
+                  <a:cs typeface="Times New Roman" panose="02020603050405020304" pitchFamily="18" charset="0"/>
+                </a:rPr>
+                <a:t>AutoRepair</a:t>
+              </a:r>
+              <a:endParaRPr kumimoji="1" lang="en-US" altLang="zh-CN" dirty="0">
+                <a:latin typeface="Times New Roman" panose="02020603050405020304" pitchFamily="18" charset="0"/>
+                <a:cs typeface="Times New Roman" panose="02020603050405020304" pitchFamily="18" charset="0"/>
+              </a:endParaRPr>
+            </a:p>
+          </p:txBody>
+        </p:sp>
+      </p:grpSp>
     </p:spTree>
     <p:extLst>
       <p:ext uri="{BB962C8B-B14F-4D97-AF65-F5344CB8AC3E}">
@@ -5627,7 +6202,7 @@
         <p:spPr>
           <a:xfrm>
             <a:off x="232682" y="125245"/>
-            <a:ext cx="5354351" cy="461665"/>
+            <a:ext cx="6168676" cy="461665"/>
           </a:xfrm>
           <a:prstGeom prst="rect">
             <a:avLst/>
@@ -5658,7 +6233,7 @@
             </a:r>
             <a:r>
               <a:rPr kumimoji="1" lang="en-US" altLang="zh-CN" sz="2400" dirty="0"/>
-              <a:t>design ways</a:t>
+              <a:t>design philosophy</a:t>
             </a:r>
             <a:endParaRPr kumimoji="1" lang="zh-CN" altLang="en-US" sz="2400" dirty="0"/>
           </a:p>
@@ -5856,7 +6431,7 @@
         <p:spPr>
           <a:xfrm>
             <a:off x="4110754" y="1335733"/>
-            <a:ext cx="4386254" cy="646331"/>
+            <a:ext cx="4703308" cy="646331"/>
           </a:xfrm>
           <a:prstGeom prst="rect">
             <a:avLst/>
@@ -5884,6 +6459,14 @@
             <a:r>
               <a:rPr kumimoji="1" lang="zh-CN" altLang="en-US" dirty="0"/>
               <a:t>操作的超优化器</a:t>
+            </a:r>
+            <a:r>
+              <a:rPr kumimoji="1" lang="en-US" altLang="zh-CN" dirty="0"/>
+              <a:t>/</a:t>
+            </a:r>
+            <a:r>
+              <a:rPr kumimoji="1" lang="zh-CN" altLang="en-US" dirty="0"/>
+              <a:t>调度器</a:t>
             </a:r>
             <a:endParaRPr kumimoji="1" lang="en-US" altLang="zh-CN" dirty="0"/>
           </a:p>
@@ -6579,6 +7162,755 @@
     <p:extLst>
       <p:ext uri="{BB962C8B-B14F-4D97-AF65-F5344CB8AC3E}">
         <p14:creationId xmlns:p14="http://schemas.microsoft.com/office/powerpoint/2010/main" val="4193450253"/>
+      </p:ext>
+    </p:extLst>
+  </p:cSld>
+  <p:clrMapOvr>
+    <a:masterClrMapping/>
+  </p:clrMapOvr>
+</p:sld>
+</file>
+
+<file path=ppt/slides/slide7.xml><?xml version="1.0" encoding="utf-8"?>
+<p:sld xmlns:a="http://schemas.openxmlformats.org/drawingml/2006/main" xmlns:r="http://schemas.openxmlformats.org/officeDocument/2006/relationships" xmlns:p="http://schemas.openxmlformats.org/presentationml/2006/main">
+  <p:cSld>
+    <p:spTree>
+      <p:nvGrpSpPr>
+        <p:cNvPr id="1" name=""/>
+        <p:cNvGrpSpPr/>
+        <p:nvPr/>
+      </p:nvGrpSpPr>
+      <p:grpSpPr>
+        <a:xfrm>
+          <a:off x="0" y="0"/>
+          <a:ext cx="0" cy="0"/>
+          <a:chOff x="0" y="0"/>
+          <a:chExt cx="0" cy="0"/>
+        </a:xfrm>
+      </p:grpSpPr>
+      <p:grpSp>
+        <p:nvGrpSpPr>
+          <p:cNvPr id="23" name="组合 22">
+            <a:extLst>
+              <a:ext uri="{FF2B5EF4-FFF2-40B4-BE49-F238E27FC236}">
+                <a16:creationId xmlns:a16="http://schemas.microsoft.com/office/drawing/2014/main" id="{A0116E09-9425-15FD-B188-C7836FE4C434}"/>
+              </a:ext>
+            </a:extLst>
+          </p:cNvPr>
+          <p:cNvGrpSpPr/>
+          <p:nvPr/>
+        </p:nvGrpSpPr>
+        <p:grpSpPr>
+          <a:xfrm>
+            <a:off x="1894787" y="518473"/>
+            <a:ext cx="8121134" cy="4307185"/>
+            <a:chOff x="1894787" y="518473"/>
+            <a:chExt cx="8121134" cy="4307185"/>
+          </a:xfrm>
+        </p:grpSpPr>
+        <p:sp>
+          <p:nvSpPr>
+            <p:cNvPr id="4" name="文本框 3">
+              <a:extLst>
+                <a:ext uri="{FF2B5EF4-FFF2-40B4-BE49-F238E27FC236}">
+                  <a16:creationId xmlns:a16="http://schemas.microsoft.com/office/drawing/2014/main" id="{E6A43FAA-2B7B-C843-292E-96A835F1762F}"/>
+                </a:ext>
+              </a:extLst>
+            </p:cNvPr>
+            <p:cNvSpPr txBox="1"/>
+            <p:nvPr/>
+          </p:nvSpPr>
+          <p:spPr>
+            <a:xfrm>
+              <a:off x="1894787" y="518473"/>
+              <a:ext cx="8121134" cy="369332"/>
+            </a:xfrm>
+            <a:prstGeom prst="rect">
+              <a:avLst/>
+            </a:prstGeom>
+            <a:noFill/>
+          </p:spPr>
+          <p:txBody>
+            <a:bodyPr wrap="none" rtlCol="0">
+              <a:spAutoFit/>
+            </a:bodyPr>
+            <a:lstStyle/>
+            <a:p>
+              <a:r>
+                <a:rPr kumimoji="1" lang="en-US" altLang="zh-CN" b="1" dirty="0">
+                  <a:latin typeface="Times New Roman" panose="02020603050405020304" pitchFamily="18" charset="0"/>
+                  <a:cs typeface="Times New Roman" panose="02020603050405020304" pitchFamily="18" charset="0"/>
+                </a:rPr>
+                <a:t>Digital libraries </a:t>
+              </a:r>
+              <a:r>
+                <a:rPr kumimoji="1" lang="en-US" altLang="zh-CN" dirty="0">
+                  <a:latin typeface="Times New Roman" panose="02020603050405020304" pitchFamily="18" charset="0"/>
+                  <a:cs typeface="Times New Roman" panose="02020603050405020304" pitchFamily="18" charset="0"/>
+                </a:rPr>
+                <a:t>(Google Scholar, ACM Digital Library, IEEE Xplore, and </a:t>
+              </a:r>
+              <a:r>
+                <a:rPr kumimoji="1" lang="en-US" altLang="zh-CN" dirty="0" err="1">
+                  <a:latin typeface="Times New Roman" panose="02020603050405020304" pitchFamily="18" charset="0"/>
+                  <a:cs typeface="Times New Roman" panose="02020603050405020304" pitchFamily="18" charset="0"/>
+                </a:rPr>
+                <a:t>Arxiv.org</a:t>
+              </a:r>
+              <a:r>
+                <a:rPr kumimoji="1" lang="en-US" altLang="zh-CN" dirty="0">
+                  <a:latin typeface="Times New Roman" panose="02020603050405020304" pitchFamily="18" charset="0"/>
+                  <a:cs typeface="Times New Roman" panose="02020603050405020304" pitchFamily="18" charset="0"/>
+                </a:rPr>
+                <a:t>)</a:t>
+              </a:r>
+            </a:p>
+          </p:txBody>
+        </p:sp>
+        <p:sp>
+          <p:nvSpPr>
+            <p:cNvPr id="5" name="文本框 4">
+              <a:extLst>
+                <a:ext uri="{FF2B5EF4-FFF2-40B4-BE49-F238E27FC236}">
+                  <a16:creationId xmlns:a16="http://schemas.microsoft.com/office/drawing/2014/main" id="{C883771C-DF2F-4AFF-5AC8-1ACE6E0A528F}"/>
+                </a:ext>
+              </a:extLst>
+            </p:cNvPr>
+            <p:cNvSpPr txBox="1"/>
+            <p:nvPr/>
+          </p:nvSpPr>
+          <p:spPr>
+            <a:xfrm>
+              <a:off x="4242061" y="1472151"/>
+              <a:ext cx="5671736" cy="646331"/>
+            </a:xfrm>
+            <a:prstGeom prst="rect">
+              <a:avLst/>
+            </a:prstGeom>
+            <a:noFill/>
+          </p:spPr>
+          <p:txBody>
+            <a:bodyPr wrap="square" rtlCol="0">
+              <a:spAutoFit/>
+            </a:bodyPr>
+            <a:lstStyle/>
+            <a:p>
+              <a:r>
+                <a:rPr kumimoji="1" lang="en-US" altLang="zh-CN" b="1" dirty="0">
+                  <a:latin typeface="Times New Roman" panose="02020603050405020304" pitchFamily="18" charset="0"/>
+                  <a:cs typeface="Times New Roman" panose="02020603050405020304" pitchFamily="18" charset="0"/>
+                </a:rPr>
+                <a:t>Phase 1: </a:t>
+              </a:r>
+              <a:r>
+                <a:rPr kumimoji="1" lang="en-US" altLang="zh-CN" dirty="0">
+                  <a:latin typeface="Times New Roman" panose="02020603050405020304" pitchFamily="18" charset="0"/>
+                  <a:cs typeface="Times New Roman" panose="02020603050405020304" pitchFamily="18" charset="0"/>
+                </a:rPr>
+                <a:t>search with selected search keywords and filtering with inclusion and exclusion criteria</a:t>
+              </a:r>
+            </a:p>
+          </p:txBody>
+        </p:sp>
+        <p:sp>
+          <p:nvSpPr>
+            <p:cNvPr id="6" name="文本框 5">
+              <a:extLst>
+                <a:ext uri="{FF2B5EF4-FFF2-40B4-BE49-F238E27FC236}">
+                  <a16:creationId xmlns:a16="http://schemas.microsoft.com/office/drawing/2014/main" id="{75D0B7B9-AE40-4C47-3126-EB0CB5887F84}"/>
+                </a:ext>
+              </a:extLst>
+            </p:cNvPr>
+            <p:cNvSpPr txBox="1"/>
+            <p:nvPr/>
+          </p:nvSpPr>
+          <p:spPr>
+            <a:xfrm>
+              <a:off x="4242061" y="2677689"/>
+              <a:ext cx="5671736" cy="369332"/>
+            </a:xfrm>
+            <a:prstGeom prst="rect">
+              <a:avLst/>
+            </a:prstGeom>
+            <a:noFill/>
+          </p:spPr>
+          <p:txBody>
+            <a:bodyPr wrap="square" rtlCol="0">
+              <a:spAutoFit/>
+            </a:bodyPr>
+            <a:lstStyle/>
+            <a:p>
+              <a:r>
+                <a:rPr kumimoji="1" lang="en-US" altLang="zh-CN" b="1" dirty="0">
+                  <a:latin typeface="Times New Roman" panose="02020603050405020304" pitchFamily="18" charset="0"/>
+                  <a:cs typeface="Times New Roman" panose="02020603050405020304" pitchFamily="18" charset="0"/>
+                </a:rPr>
+                <a:t>Phase 2: </a:t>
+              </a:r>
+              <a:r>
+                <a:rPr kumimoji="1" lang="en-US" altLang="zh-CN" dirty="0">
+                  <a:latin typeface="Times New Roman" panose="02020603050405020304" pitchFamily="18" charset="0"/>
+                  <a:cs typeface="Times New Roman" panose="02020603050405020304" pitchFamily="18" charset="0"/>
+                </a:rPr>
+                <a:t>Category assignment, duplicate removal</a:t>
+              </a:r>
+            </a:p>
+          </p:txBody>
+        </p:sp>
+        <p:sp>
+          <p:nvSpPr>
+            <p:cNvPr id="7" name="文本框 6">
+              <a:extLst>
+                <a:ext uri="{FF2B5EF4-FFF2-40B4-BE49-F238E27FC236}">
+                  <a16:creationId xmlns:a16="http://schemas.microsoft.com/office/drawing/2014/main" id="{2BDF17CE-D7A4-AB2F-D3A3-1812684D812B}"/>
+                </a:ext>
+              </a:extLst>
+            </p:cNvPr>
+            <p:cNvSpPr txBox="1"/>
+            <p:nvPr/>
+          </p:nvSpPr>
+          <p:spPr>
+            <a:xfrm>
+              <a:off x="4240050" y="3835813"/>
+              <a:ext cx="5671736" cy="646331"/>
+            </a:xfrm>
+            <a:prstGeom prst="rect">
+              <a:avLst/>
+            </a:prstGeom>
+            <a:noFill/>
+          </p:spPr>
+          <p:txBody>
+            <a:bodyPr wrap="square" rtlCol="0">
+              <a:spAutoFit/>
+            </a:bodyPr>
+            <a:lstStyle/>
+            <a:p>
+              <a:r>
+                <a:rPr kumimoji="1" lang="en-US" altLang="zh-CN" b="1" dirty="0">
+                  <a:latin typeface="Times New Roman" panose="02020603050405020304" pitchFamily="18" charset="0"/>
+                  <a:cs typeface="Times New Roman" panose="02020603050405020304" pitchFamily="18" charset="0"/>
+                </a:rPr>
+                <a:t>Phase 3: </a:t>
+              </a:r>
+              <a:r>
+                <a:rPr kumimoji="1" lang="en-US" altLang="zh-CN" dirty="0">
+                  <a:latin typeface="Times New Roman" panose="02020603050405020304" pitchFamily="18" charset="0"/>
+                  <a:cs typeface="Times New Roman" panose="02020603050405020304" pitchFamily="18" charset="0"/>
+                </a:rPr>
+                <a:t>Filtering with scope exclusion criteria and make detailed summaries</a:t>
+              </a:r>
+            </a:p>
+          </p:txBody>
+        </p:sp>
+        <p:pic>
+          <p:nvPicPr>
+            <p:cNvPr id="9" name="图形 8" descr="筛选 轮廓">
+              <a:extLst>
+                <a:ext uri="{FF2B5EF4-FFF2-40B4-BE49-F238E27FC236}">
+                  <a16:creationId xmlns:a16="http://schemas.microsoft.com/office/drawing/2014/main" id="{D9309CF8-22CF-D477-2145-3CAFA8F75935}"/>
+                </a:ext>
+              </a:extLst>
+            </p:cNvPr>
+            <p:cNvPicPr>
+              <a:picLocks noChangeAspect="1"/>
+            </p:cNvPicPr>
+            <p:nvPr/>
+          </p:nvPicPr>
+          <p:blipFill>
+            <a:blip r:embed="rId2">
+              <a:extLst>
+                <a:ext uri="{96DAC541-7B7A-43D3-8B79-37D633B846F1}">
+                  <asvg:svgBlip xmlns:asvg="http://schemas.microsoft.com/office/drawing/2016/SVG/main" r:embed="rId3"/>
+                </a:ext>
+              </a:extLst>
+            </a:blip>
+            <a:stretch>
+              <a:fillRect/>
+            </a:stretch>
+          </p:blipFill>
+          <p:spPr>
+            <a:xfrm>
+              <a:off x="2955482" y="1205541"/>
+              <a:ext cx="1179549" cy="1179549"/>
+            </a:xfrm>
+            <a:prstGeom prst="rect">
+              <a:avLst/>
+            </a:prstGeom>
+          </p:spPr>
+        </p:pic>
+        <p:sp>
+          <p:nvSpPr>
+            <p:cNvPr id="10" name="文本框 9">
+              <a:extLst>
+                <a:ext uri="{FF2B5EF4-FFF2-40B4-BE49-F238E27FC236}">
+                  <a16:creationId xmlns:a16="http://schemas.microsoft.com/office/drawing/2014/main" id="{867AB45E-D582-1590-8737-6709FBBDA7B1}"/>
+                </a:ext>
+              </a:extLst>
+            </p:cNvPr>
+            <p:cNvSpPr txBox="1"/>
+            <p:nvPr/>
+          </p:nvSpPr>
+          <p:spPr>
+            <a:xfrm>
+              <a:off x="3390563" y="1378835"/>
+              <a:ext cx="306494" cy="369332"/>
+            </a:xfrm>
+            <a:prstGeom prst="rect">
+              <a:avLst/>
+            </a:prstGeom>
+            <a:noFill/>
+          </p:spPr>
+          <p:txBody>
+            <a:bodyPr wrap="none" rtlCol="0">
+              <a:spAutoFit/>
+            </a:bodyPr>
+            <a:lstStyle/>
+            <a:p>
+              <a:r>
+                <a:rPr kumimoji="1" lang="en-US" altLang="zh-CN" b="1" dirty="0">
+                  <a:latin typeface="Times New Roman" panose="02020603050405020304" pitchFamily="18" charset="0"/>
+                  <a:cs typeface="Times New Roman" panose="02020603050405020304" pitchFamily="18" charset="0"/>
+                </a:rPr>
+                <a:t>1</a:t>
+              </a:r>
+              <a:endParaRPr kumimoji="1" lang="zh-CN" altLang="en-US" b="1" dirty="0">
+                <a:latin typeface="Times New Roman" panose="02020603050405020304" pitchFamily="18" charset="0"/>
+                <a:cs typeface="Times New Roman" panose="02020603050405020304" pitchFamily="18" charset="0"/>
+              </a:endParaRPr>
+            </a:p>
+          </p:txBody>
+        </p:sp>
+        <p:sp>
+          <p:nvSpPr>
+            <p:cNvPr id="13" name="右箭头 12">
+              <a:extLst>
+                <a:ext uri="{FF2B5EF4-FFF2-40B4-BE49-F238E27FC236}">
+                  <a16:creationId xmlns:a16="http://schemas.microsoft.com/office/drawing/2014/main" id="{79FD2464-5853-C9A6-A38E-C4DDD7F0698C}"/>
+                </a:ext>
+              </a:extLst>
+            </p:cNvPr>
+            <p:cNvSpPr/>
+            <p:nvPr/>
+          </p:nvSpPr>
+          <p:spPr>
+            <a:xfrm rot="5400000">
+              <a:off x="3359143" y="867750"/>
+              <a:ext cx="369333" cy="409444"/>
+            </a:xfrm>
+            <a:prstGeom prst="rightArrow">
+              <a:avLst/>
+            </a:prstGeom>
+            <a:noFill/>
+          </p:spPr>
+          <p:style>
+            <a:lnRef idx="2">
+              <a:schemeClr val="dk1">
+                <a:shade val="15000"/>
+              </a:schemeClr>
+            </a:lnRef>
+            <a:fillRef idx="1">
+              <a:schemeClr val="dk1"/>
+            </a:fillRef>
+            <a:effectRef idx="0">
+              <a:schemeClr val="dk1"/>
+            </a:effectRef>
+            <a:fontRef idx="minor">
+              <a:schemeClr val="lt1"/>
+            </a:fontRef>
+          </p:style>
+          <p:txBody>
+            <a:bodyPr rtlCol="0" anchor="ctr"/>
+            <a:lstStyle/>
+            <a:p>
+              <a:pPr algn="ctr"/>
+              <a:endParaRPr kumimoji="1" lang="zh-CN" altLang="en-US"/>
+            </a:p>
+          </p:txBody>
+        </p:sp>
+        <p:sp>
+          <p:nvSpPr>
+            <p:cNvPr id="14" name="文本框 13">
+              <a:extLst>
+                <a:ext uri="{FF2B5EF4-FFF2-40B4-BE49-F238E27FC236}">
+                  <a16:creationId xmlns:a16="http://schemas.microsoft.com/office/drawing/2014/main" id="{E81BB7AB-8A75-B5A6-5CBF-77ED7DC115EE}"/>
+                </a:ext>
+              </a:extLst>
+            </p:cNvPr>
+            <p:cNvSpPr txBox="1"/>
+            <p:nvPr/>
+          </p:nvSpPr>
+          <p:spPr>
+            <a:xfrm>
+              <a:off x="3282648" y="2200424"/>
+              <a:ext cx="522322" cy="369332"/>
+            </a:xfrm>
+            <a:prstGeom prst="rect">
+              <a:avLst/>
+            </a:prstGeom>
+            <a:noFill/>
+          </p:spPr>
+          <p:txBody>
+            <a:bodyPr wrap="none" rtlCol="0">
+              <a:spAutoFit/>
+            </a:bodyPr>
+            <a:lstStyle/>
+            <a:p>
+              <a:r>
+                <a:rPr kumimoji="1" lang="en-US" altLang="zh-CN" b="1" dirty="0">
+                  <a:latin typeface="Times New Roman" panose="02020603050405020304" pitchFamily="18" charset="0"/>
+                  <a:cs typeface="Times New Roman" panose="02020603050405020304" pitchFamily="18" charset="0"/>
+                </a:rPr>
+                <a:t>311</a:t>
+              </a:r>
+              <a:endParaRPr kumimoji="1" lang="zh-CN" altLang="en-US" b="1" dirty="0">
+                <a:latin typeface="Times New Roman" panose="02020603050405020304" pitchFamily="18" charset="0"/>
+                <a:cs typeface="Times New Roman" panose="02020603050405020304" pitchFamily="18" charset="0"/>
+              </a:endParaRPr>
+            </a:p>
+          </p:txBody>
+        </p:sp>
+        <p:grpSp>
+          <p:nvGrpSpPr>
+            <p:cNvPr id="15" name="组合 14">
+              <a:extLst>
+                <a:ext uri="{FF2B5EF4-FFF2-40B4-BE49-F238E27FC236}">
+                  <a16:creationId xmlns:a16="http://schemas.microsoft.com/office/drawing/2014/main" id="{78EB10C1-9DE5-8A83-0AF4-79C967C87F62}"/>
+                </a:ext>
+              </a:extLst>
+            </p:cNvPr>
+            <p:cNvGrpSpPr/>
+            <p:nvPr/>
+          </p:nvGrpSpPr>
+          <p:grpSpPr>
+            <a:xfrm>
+              <a:off x="2955482" y="2385090"/>
+              <a:ext cx="1179549" cy="1179549"/>
+              <a:chOff x="2882653" y="1218536"/>
+              <a:chExt cx="1179549" cy="1179549"/>
+            </a:xfrm>
+          </p:grpSpPr>
+          <p:pic>
+            <p:nvPicPr>
+              <p:cNvPr id="16" name="图形 15" descr="筛选 轮廓">
+                <a:extLst>
+                  <a:ext uri="{FF2B5EF4-FFF2-40B4-BE49-F238E27FC236}">
+                    <a16:creationId xmlns:a16="http://schemas.microsoft.com/office/drawing/2014/main" id="{92E851DE-F0EF-6931-15C3-1B865A191930}"/>
+                  </a:ext>
+                </a:extLst>
+              </p:cNvPr>
+              <p:cNvPicPr>
+                <a:picLocks noChangeAspect="1"/>
+              </p:cNvPicPr>
+              <p:nvPr/>
+            </p:nvPicPr>
+            <p:blipFill>
+              <a:blip r:embed="rId2">
+                <a:extLst>
+                  <a:ext uri="{96DAC541-7B7A-43D3-8B79-37D633B846F1}">
+                    <asvg:svgBlip xmlns:asvg="http://schemas.microsoft.com/office/drawing/2016/SVG/main" r:embed="rId3"/>
+                  </a:ext>
+                </a:extLst>
+              </a:blip>
+              <a:stretch>
+                <a:fillRect/>
+              </a:stretch>
+            </p:blipFill>
+            <p:spPr>
+              <a:xfrm>
+                <a:off x="2882653" y="1218536"/>
+                <a:ext cx="1179549" cy="1179549"/>
+              </a:xfrm>
+              <a:prstGeom prst="rect">
+                <a:avLst/>
+              </a:prstGeom>
+            </p:spPr>
+          </p:pic>
+          <p:sp>
+            <p:nvSpPr>
+              <p:cNvPr id="17" name="文本框 16">
+                <a:extLst>
+                  <a:ext uri="{FF2B5EF4-FFF2-40B4-BE49-F238E27FC236}">
+                    <a16:creationId xmlns:a16="http://schemas.microsoft.com/office/drawing/2014/main" id="{55A6FE85-CFFA-CF9D-A9ED-A93FE88ACFC5}"/>
+                  </a:ext>
+                </a:extLst>
+              </p:cNvPr>
+              <p:cNvSpPr txBox="1"/>
+              <p:nvPr/>
+            </p:nvSpPr>
+            <p:spPr>
+              <a:xfrm>
+                <a:off x="3317734" y="1391830"/>
+                <a:ext cx="306494" cy="369332"/>
+              </a:xfrm>
+              <a:prstGeom prst="rect">
+                <a:avLst/>
+              </a:prstGeom>
+              <a:noFill/>
+            </p:spPr>
+            <p:txBody>
+              <a:bodyPr wrap="none" rtlCol="0">
+                <a:spAutoFit/>
+              </a:bodyPr>
+              <a:lstStyle/>
+              <a:p>
+                <a:r>
+                  <a:rPr kumimoji="1" lang="en-US" altLang="zh-CN" b="1" dirty="0">
+                    <a:latin typeface="Times New Roman" panose="02020603050405020304" pitchFamily="18" charset="0"/>
+                    <a:cs typeface="Times New Roman" panose="02020603050405020304" pitchFamily="18" charset="0"/>
+                  </a:rPr>
+                  <a:t>2</a:t>
+                </a:r>
+                <a:endParaRPr kumimoji="1" lang="zh-CN" altLang="en-US" b="1" dirty="0">
+                  <a:latin typeface="Times New Roman" panose="02020603050405020304" pitchFamily="18" charset="0"/>
+                  <a:cs typeface="Times New Roman" panose="02020603050405020304" pitchFamily="18" charset="0"/>
+                </a:endParaRPr>
+              </a:p>
+            </p:txBody>
+          </p:sp>
+        </p:grpSp>
+        <p:sp>
+          <p:nvSpPr>
+            <p:cNvPr id="18" name="文本框 17">
+              <a:extLst>
+                <a:ext uri="{FF2B5EF4-FFF2-40B4-BE49-F238E27FC236}">
+                  <a16:creationId xmlns:a16="http://schemas.microsoft.com/office/drawing/2014/main" id="{F0CE0DAD-A806-9BB8-C81E-938670967288}"/>
+                </a:ext>
+              </a:extLst>
+            </p:cNvPr>
+            <p:cNvSpPr txBox="1"/>
+            <p:nvPr/>
+          </p:nvSpPr>
+          <p:spPr>
+            <a:xfrm>
+              <a:off x="3274054" y="4456326"/>
+              <a:ext cx="530915" cy="369332"/>
+            </a:xfrm>
+            <a:prstGeom prst="rect">
+              <a:avLst/>
+            </a:prstGeom>
+            <a:noFill/>
+          </p:spPr>
+          <p:txBody>
+            <a:bodyPr wrap="none" rtlCol="0">
+              <a:spAutoFit/>
+            </a:bodyPr>
+            <a:lstStyle/>
+            <a:p>
+              <a:r>
+                <a:rPr kumimoji="1" lang="en-US" altLang="zh-CN" b="1" dirty="0">
+                  <a:latin typeface="Times New Roman" panose="02020603050405020304" pitchFamily="18" charset="0"/>
+                  <a:cs typeface="Times New Roman" panose="02020603050405020304" pitchFamily="18" charset="0"/>
+                </a:rPr>
+                <a:t>159</a:t>
+              </a:r>
+              <a:endParaRPr kumimoji="1" lang="zh-CN" altLang="en-US" b="1" dirty="0">
+                <a:latin typeface="Times New Roman" panose="02020603050405020304" pitchFamily="18" charset="0"/>
+                <a:cs typeface="Times New Roman" panose="02020603050405020304" pitchFamily="18" charset="0"/>
+              </a:endParaRPr>
+            </a:p>
+          </p:txBody>
+        </p:sp>
+        <p:grpSp>
+          <p:nvGrpSpPr>
+            <p:cNvPr id="19" name="组合 18">
+              <a:extLst>
+                <a:ext uri="{FF2B5EF4-FFF2-40B4-BE49-F238E27FC236}">
+                  <a16:creationId xmlns:a16="http://schemas.microsoft.com/office/drawing/2014/main" id="{DADCE4F1-A301-E173-F6FE-186E46A78AF7}"/>
+                </a:ext>
+              </a:extLst>
+            </p:cNvPr>
+            <p:cNvGrpSpPr/>
+            <p:nvPr/>
+          </p:nvGrpSpPr>
+          <p:grpSpPr>
+            <a:xfrm>
+              <a:off x="2955482" y="3513041"/>
+              <a:ext cx="1179549" cy="1179549"/>
+              <a:chOff x="2882653" y="1218536"/>
+              <a:chExt cx="1179549" cy="1179549"/>
+            </a:xfrm>
+          </p:grpSpPr>
+          <p:pic>
+            <p:nvPicPr>
+              <p:cNvPr id="20" name="图形 19" descr="筛选 轮廓">
+                <a:extLst>
+                  <a:ext uri="{FF2B5EF4-FFF2-40B4-BE49-F238E27FC236}">
+                    <a16:creationId xmlns:a16="http://schemas.microsoft.com/office/drawing/2014/main" id="{85E19234-89FD-6E89-0540-30A0C9D7EC84}"/>
+                  </a:ext>
+                </a:extLst>
+              </p:cNvPr>
+              <p:cNvPicPr>
+                <a:picLocks noChangeAspect="1"/>
+              </p:cNvPicPr>
+              <p:nvPr/>
+            </p:nvPicPr>
+            <p:blipFill>
+              <a:blip r:embed="rId2">
+                <a:extLst>
+                  <a:ext uri="{96DAC541-7B7A-43D3-8B79-37D633B846F1}">
+                    <asvg:svgBlip xmlns:asvg="http://schemas.microsoft.com/office/drawing/2016/SVG/main" r:embed="rId3"/>
+                  </a:ext>
+                </a:extLst>
+              </a:blip>
+              <a:stretch>
+                <a:fillRect/>
+              </a:stretch>
+            </p:blipFill>
+            <p:spPr>
+              <a:xfrm>
+                <a:off x="2882653" y="1218536"/>
+                <a:ext cx="1179549" cy="1179549"/>
+              </a:xfrm>
+              <a:prstGeom prst="rect">
+                <a:avLst/>
+              </a:prstGeom>
+            </p:spPr>
+          </p:pic>
+          <p:sp>
+            <p:nvSpPr>
+              <p:cNvPr id="21" name="文本框 20">
+                <a:extLst>
+                  <a:ext uri="{FF2B5EF4-FFF2-40B4-BE49-F238E27FC236}">
+                    <a16:creationId xmlns:a16="http://schemas.microsoft.com/office/drawing/2014/main" id="{13709BC7-32C1-ABC9-9369-C5B5CC067F58}"/>
+                  </a:ext>
+                </a:extLst>
+              </p:cNvPr>
+              <p:cNvSpPr txBox="1"/>
+              <p:nvPr/>
+            </p:nvSpPr>
+            <p:spPr>
+              <a:xfrm>
+                <a:off x="3317734" y="1391830"/>
+                <a:ext cx="306494" cy="369332"/>
+              </a:xfrm>
+              <a:prstGeom prst="rect">
+                <a:avLst/>
+              </a:prstGeom>
+              <a:noFill/>
+            </p:spPr>
+            <p:txBody>
+              <a:bodyPr wrap="none" rtlCol="0">
+                <a:spAutoFit/>
+              </a:bodyPr>
+              <a:lstStyle/>
+              <a:p>
+                <a:r>
+                  <a:rPr kumimoji="1" lang="en-US" altLang="zh-CN" b="1" dirty="0">
+                    <a:latin typeface="Times New Roman" panose="02020603050405020304" pitchFamily="18" charset="0"/>
+                    <a:cs typeface="Times New Roman" panose="02020603050405020304" pitchFamily="18" charset="0"/>
+                  </a:rPr>
+                  <a:t>3</a:t>
+                </a:r>
+                <a:endParaRPr kumimoji="1" lang="zh-CN" altLang="en-US" b="1" dirty="0">
+                  <a:latin typeface="Times New Roman" panose="02020603050405020304" pitchFamily="18" charset="0"/>
+                  <a:cs typeface="Times New Roman" panose="02020603050405020304" pitchFamily="18" charset="0"/>
+                </a:endParaRPr>
+              </a:p>
+            </p:txBody>
+          </p:sp>
+        </p:grpSp>
+        <p:sp>
+          <p:nvSpPr>
+            <p:cNvPr id="22" name="文本框 21">
+              <a:extLst>
+                <a:ext uri="{FF2B5EF4-FFF2-40B4-BE49-F238E27FC236}">
+                  <a16:creationId xmlns:a16="http://schemas.microsoft.com/office/drawing/2014/main" id="{8CC1B24A-CBCC-9A68-C906-E81584598861}"/>
+                </a:ext>
+              </a:extLst>
+            </p:cNvPr>
+            <p:cNvSpPr txBox="1"/>
+            <p:nvPr/>
+          </p:nvSpPr>
+          <p:spPr>
+            <a:xfrm>
+              <a:off x="3274055" y="3328375"/>
+              <a:ext cx="530915" cy="369332"/>
+            </a:xfrm>
+            <a:prstGeom prst="rect">
+              <a:avLst/>
+            </a:prstGeom>
+            <a:noFill/>
+          </p:spPr>
+          <p:txBody>
+            <a:bodyPr wrap="none" rtlCol="0">
+              <a:spAutoFit/>
+            </a:bodyPr>
+            <a:lstStyle/>
+            <a:p>
+              <a:r>
+                <a:rPr kumimoji="1" lang="en-US" altLang="zh-CN" b="1" dirty="0">
+                  <a:latin typeface="Times New Roman" panose="02020603050405020304" pitchFamily="18" charset="0"/>
+                  <a:cs typeface="Times New Roman" panose="02020603050405020304" pitchFamily="18" charset="0"/>
+                </a:rPr>
+                <a:t>246</a:t>
+              </a:r>
+              <a:endParaRPr kumimoji="1" lang="zh-CN" altLang="en-US" b="1" dirty="0">
+                <a:latin typeface="Times New Roman" panose="02020603050405020304" pitchFamily="18" charset="0"/>
+                <a:cs typeface="Times New Roman" panose="02020603050405020304" pitchFamily="18" charset="0"/>
+              </a:endParaRPr>
+            </a:p>
+          </p:txBody>
+        </p:sp>
+      </p:grpSp>
+    </p:spTree>
+    <p:extLst>
+      <p:ext uri="{BB962C8B-B14F-4D97-AF65-F5344CB8AC3E}">
+        <p14:creationId xmlns:p14="http://schemas.microsoft.com/office/powerpoint/2010/main" val="2563894416"/>
+      </p:ext>
+    </p:extLst>
+  </p:cSld>
+  <p:clrMapOvr>
+    <a:masterClrMapping/>
+  </p:clrMapOvr>
+</p:sld>
+</file>
+
+<file path=ppt/slides/slide8.xml><?xml version="1.0" encoding="utf-8"?>
+<p:sld xmlns:a="http://schemas.openxmlformats.org/drawingml/2006/main" xmlns:r="http://schemas.openxmlformats.org/officeDocument/2006/relationships" xmlns:p="http://schemas.openxmlformats.org/presentationml/2006/main">
+  <p:cSld>
+    <p:spTree>
+      <p:nvGrpSpPr>
+        <p:cNvPr id="1" name=""/>
+        <p:cNvGrpSpPr/>
+        <p:nvPr/>
+      </p:nvGrpSpPr>
+      <p:grpSpPr>
+        <a:xfrm>
+          <a:off x="0" y="0"/>
+          <a:ext cx="0" cy="0"/>
+          <a:chOff x="0" y="0"/>
+          <a:chExt cx="0" cy="0"/>
+        </a:xfrm>
+      </p:grpSpPr>
+      <p:sp>
+        <p:nvSpPr>
+          <p:cNvPr id="3" name="内容占位符 2">
+            <a:extLst>
+              <a:ext uri="{FF2B5EF4-FFF2-40B4-BE49-F238E27FC236}">
+                <a16:creationId xmlns:a16="http://schemas.microsoft.com/office/drawing/2014/main" id="{27464930-BF8E-61F9-DD22-0690F2923A7C}"/>
+              </a:ext>
+            </a:extLst>
+          </p:cNvPr>
+          <p:cNvSpPr>
+            <a:spLocks noGrp="1"/>
+          </p:cNvSpPr>
+          <p:nvPr>
+            <p:ph idx="1"/>
+          </p:nvPr>
+        </p:nvSpPr>
+        <p:spPr/>
+        <p:txBody>
+          <a:bodyPr/>
+          <a:lstStyle/>
+          <a:p>
+            <a:endParaRPr kumimoji="1" lang="zh-CN" altLang="en-US"/>
+          </a:p>
+        </p:txBody>
+      </p:sp>
+    </p:spTree>
+    <p:extLst>
+      <p:ext uri="{BB962C8B-B14F-4D97-AF65-F5344CB8AC3E}">
+        <p14:creationId xmlns:p14="http://schemas.microsoft.com/office/powerpoint/2010/main" val="3384973883"/>
       </p:ext>
     </p:extLst>
   </p:cSld>
